--- a/marketing/partners/sitall-deck-ploshadka.pptx
+++ b/marketing/partners/sitall-deck-ploshadka.pptx
@@ -15,10 +15,9 @@
     <p:sldId id="263" r:id="rId9"/>
     <p:sldId id="264" r:id="rId10"/>
     <p:sldId id="265" r:id="rId11"/>
-    <p:sldId id="266" r:id="rId12"/>
   </p:sldIdLst>
   <p:notesMasterIdLst>
-    <p:notesMasterId r:id="rId13"/>
+    <p:notesMasterId r:id="rId12"/>
   </p:notesMasterIdLst>
   <p:sldSz cx="12192000" cy="6858000"/>
   <p:notesSz cx="6858000" cy="12192000"/>
@@ -624,94 +623,6 @@
             <a:fld id="{F7021451-1387-4CA6-816F-3879F97B5CBC}" type="slidenum">
               <a:rPr lang="en-US"/>
               <a:t>10</a:t>
-            </a:fld>
-            <a:endParaRPr lang="en-US"/>
-          </a:p>
-        </p:txBody>
-      </p:sp>
-    </p:spTree>
-    <p:extLst>
-      <p:ext uri="{BB962C8B-B14F-4D97-AF65-F5344CB8AC3E}">
-        <p14:creationId xmlns:p14="http://schemas.microsoft.com/office/powerpoint/2010/main" val="1024086991"/>
-      </p:ext>
-    </p:extLst>
-  </p:cSld>
-  <p:clrMapOvr>
-    <a:masterClrMapping/>
-  </p:clrMapOvr>
-</p:notes>
-</file>
-
-<file path=ppt/notesSlides/notesSlide11.xml><?xml version="1.0" encoding="utf-8"?>
-<p:notes xmlns:a="http://schemas.openxmlformats.org/drawingml/2006/main" xmlns:r="http://schemas.openxmlformats.org/officeDocument/2006/relationships" xmlns:p="http://schemas.openxmlformats.org/presentationml/2006/main">
-  <p:cSld>
-    <p:spTree>
-      <p:nvGrpSpPr>
-        <p:cNvPr id="1" name=""/>
-        <p:cNvGrpSpPr/>
-        <p:nvPr/>
-      </p:nvGrpSpPr>
-      <p:grpSpPr>
-        <a:xfrm>
-          <a:off x="0" y="0"/>
-          <a:ext cx="0" cy="0"/>
-          <a:chOff x="0" y="0"/>
-          <a:chExt cx="0" cy="0"/>
-        </a:xfrm>
-      </p:grpSpPr>
-      <p:sp>
-        <p:nvSpPr>
-          <p:cNvPr id="2" name="Slide Image Placeholder 1"/>
-          <p:cNvSpPr>
-            <a:spLocks noGrp="1" noRot="1" noChangeAspect="1"/>
-          </p:cNvSpPr>
-          <p:nvPr>
-            <p:ph type="sldImg"/>
-          </p:nvPr>
-        </p:nvSpPr>
-        <p:spPr/>
-      </p:sp>
-      <p:sp>
-        <p:nvSpPr>
-          <p:cNvPr id="3" name="Notes Placeholder 2"/>
-          <p:cNvSpPr>
-            <a:spLocks noGrp="1"/>
-          </p:cNvSpPr>
-          <p:nvPr>
-            <p:ph type="body" idx="1"/>
-          </p:nvPr>
-        </p:nvSpPr>
-        <p:spPr/>
-        <p:txBody>
-          <a:bodyPr/>
-          <a:lstStyle/>
-          <a:p>
-            <a:r>
-              <a:rPr lang="en-US" dirty="0"/>
-              <a:t/>
-            </a:r>
-            <a:endParaRPr lang="en-US" dirty="0"/>
-          </a:p>
-        </p:txBody>
-      </p:sp>
-      <p:sp>
-        <p:nvSpPr>
-          <p:cNvPr id="4" name="Slide Number Placeholder 3"/>
-          <p:cNvSpPr>
-            <a:spLocks noGrp="1"/>
-          </p:cNvSpPr>
-          <p:nvPr>
-            <p:ph type="sldNum" sz="quarter" idx="10"/>
-          </p:nvPr>
-        </p:nvSpPr>
-        <p:spPr/>
-        <p:txBody>
-          <a:bodyPr/>
-          <a:lstStyle/>
-          <a:p>
-            <a:fld id="{F7021451-1387-4CA6-816F-3879F97B5CBC}" type="slidenum">
-              <a:rPr lang="en-US"/>
-              <a:t>11</a:t>
             </a:fld>
             <a:endParaRPr lang="en-US"/>
           </a:p>
@@ -2163,7 +2074,7 @@
                 <a:ea typeface="Segoe UI Semibold" pitchFamily="34" charset="-122"/>
                 <a:cs typeface="Segoe UI Semibold" pitchFamily="34" charset="-120"/>
               </a:rPr>
-              <a:t>КАК НАЧНЁМ</a:t>
+              <a:t>КОНТАКТЫ</a:t>
             </a:r>
             <a:endParaRPr lang="en-US" sz="1300" dirty="0"/>
           </a:p>
@@ -2202,7 +2113,7 @@
                 <a:ea typeface="Segoe UI Semibold" pitchFamily="34" charset="-122"/>
                 <a:cs typeface="Segoe UI Semibold" pitchFamily="34" charset="-120"/>
               </a:rPr>
-              <a:t>Девяносто дней без договора и без денег</a:t>
+              <a:t>С кем разговаривать</a:t>
             </a:r>
             <a:endParaRPr lang="en-US" sz="2700" dirty="0"/>
           </a:p>
@@ -2237,11 +2148,285 @@
         <p:spPr>
           <a:xfrm>
             <a:off x="502920" y="1481328"/>
-            <a:ext cx="5437480" cy="2075688"/>
+            <a:ext cx="5364328" cy="4709160"/>
           </a:xfrm>
           <a:prstGeom prst="roundRect">
             <a:avLst>
-              <a:gd name="adj" fmla="val 3965"/>
+              <a:gd name="adj" fmla="val 1748"/>
+            </a:avLst>
+          </a:prstGeom>
+          <a:solidFill>
+            <a:srgbClr val="FFFFFF"/>
+          </a:solidFill>
+          <a:ln w="22225">
+            <a:solidFill>
+              <a:srgbClr val="B4552D"/>
+            </a:solidFill>
+            <a:prstDash val="solid"/>
+          </a:ln>
+          <a:effectLst>
+            <a:outerShdw sx="100000" sy="100000" kx="0" ky="0" algn="bl" rotWithShape="0" blurRad="177800" dist="50800" dir="5400000">
+              <a:srgbClr val="7E88A8">
+                <a:alpha val="30000"/>
+              </a:srgbClr>
+            </a:outerShdw>
+          </a:effectLst>
+        </p:spPr>
+      </p:sp>
+      <p:sp>
+        <p:nvSpPr>
+          <p:cNvPr id="6" name="Shape 4"/>
+          <p:cNvSpPr/>
+          <p:nvPr/>
+        </p:nvSpPr>
+        <p:spPr>
+          <a:xfrm>
+            <a:off x="868680" y="1810512"/>
+            <a:ext cx="457200" cy="54864"/>
+          </a:xfrm>
+          <a:prstGeom prst="rect">
+            <a:avLst/>
+          </a:prstGeom>
+          <a:solidFill>
+            <a:srgbClr val="B4552D"/>
+          </a:solidFill>
+          <a:ln/>
+        </p:spPr>
+      </p:sp>
+      <p:sp>
+        <p:nvSpPr>
+          <p:cNvPr id="7" name="Text 5"/>
+          <p:cNvSpPr txBox="1"/>
+          <p:nvPr/>
+        </p:nvSpPr>
+        <p:spPr>
+          <a:xfrm>
+            <a:off x="868680" y="2011680"/>
+            <a:ext cx="4632808" cy="502920"/>
+          </a:xfrm>
+          <a:prstGeom prst="rect">
+            <a:avLst/>
+          </a:prstGeom>
+          <a:noFill/>
+          <a:ln/>
+        </p:spPr>
+        <p:txBody>
+          <a:bodyPr wrap="square" lIns="0" tIns="0" rIns="0" bIns="0" rtlCol="0" anchor="ctr"/>
+          <a:lstStyle/>
+          <a:p>
+            <a:pPr indent="0" marL="0">
+              <a:buNone/>
+            </a:pPr>
+            <a:r>
+              <a:rPr lang="en-US" sz="3000" dirty="0">
+                <a:solidFill>
+                  <a:srgbClr val="1E2761"/>
+                </a:solidFill>
+                <a:latin typeface="Segoe UI Semibold" pitchFamily="34" charset="0"/>
+                <a:ea typeface="Segoe UI Semibold" pitchFamily="34" charset="-122"/>
+                <a:cs typeface="Segoe UI Semibold" pitchFamily="34" charset="-120"/>
+              </a:rPr>
+              <a:t>Кирилл Уклонский</a:t>
+            </a:r>
+            <a:endParaRPr lang="en-US" sz="3000" dirty="0"/>
+          </a:p>
+        </p:txBody>
+      </p:sp>
+      <p:sp>
+        <p:nvSpPr>
+          <p:cNvPr id="8" name="Text 6"/>
+          <p:cNvSpPr txBox="1"/>
+          <p:nvPr/>
+        </p:nvSpPr>
+        <p:spPr>
+          <a:xfrm>
+            <a:off x="868680" y="2578608"/>
+            <a:ext cx="4632808" cy="274320"/>
+          </a:xfrm>
+          <a:prstGeom prst="rect">
+            <a:avLst/>
+          </a:prstGeom>
+          <a:noFill/>
+          <a:ln/>
+        </p:spPr>
+        <p:txBody>
+          <a:bodyPr wrap="square" lIns="0" tIns="0" rIns="0" bIns="0" rtlCol="0" anchor="ctr"/>
+          <a:lstStyle/>
+          <a:p>
+            <a:pPr indent="0" marL="0">
+              <a:buNone/>
+            </a:pPr>
+            <a:r>
+              <a:rPr lang="en-US" sz="1300" spc="200" kern="0" dirty="0">
+                <a:solidFill>
+                  <a:srgbClr val="B4552D"/>
+                </a:solidFill>
+                <a:latin typeface="Segoe UI Semibold" pitchFamily="34" charset="0"/>
+                <a:ea typeface="Segoe UI Semibold" pitchFamily="34" charset="-122"/>
+                <a:cs typeface="Segoe UI Semibold" pitchFamily="34" charset="-120"/>
+              </a:rPr>
+              <a:t>СО-ОСНОВАТЕЛЬ</a:t>
+            </a:r>
+            <a:endParaRPr lang="en-US" sz="1300" dirty="0"/>
+          </a:p>
+        </p:txBody>
+      </p:sp>
+      <p:sp>
+        <p:nvSpPr>
+          <p:cNvPr id="9" name="Text 7">
+            <a:hlinkClick r:id="rId1" tooltip=""/>
+          </p:cNvPr>
+          <p:cNvSpPr txBox="1"/>
+          <p:nvPr/>
+        </p:nvSpPr>
+        <p:spPr>
+          <a:xfrm>
+            <a:off x="868680" y="2971800"/>
+            <a:ext cx="4632808" cy="384048"/>
+          </a:xfrm>
+          <a:prstGeom prst="rect">
+            <a:avLst/>
+          </a:prstGeom>
+          <a:noFill/>
+          <a:ln/>
+        </p:spPr>
+        <p:txBody>
+          <a:bodyPr wrap="square" lIns="0" tIns="0" rIns="0" bIns="0" rtlCol="0" anchor="ctr"/>
+          <a:lstStyle/>
+          <a:p>
+            <a:pPr indent="0" marL="0">
+              <a:buNone/>
+            </a:pPr>
+            <a:r>
+              <a:rPr lang="en-US" sz="2000" u="sng" dirty="0">
+                <a:solidFill>
+                  <a:srgbClr val="1E2761"/>
+                </a:solidFill>
+                <a:latin typeface="Segoe UI Semibold" pitchFamily="34" charset="0"/>
+                <a:ea typeface="Segoe UI Semibold" pitchFamily="34" charset="-122"/>
+                <a:cs typeface="Segoe UI Semibold" pitchFamily="34" charset="-120"/>
+                <a:hlinkClick r:id="rId1" invalidUrl="" action="" tgtFrame="" tooltip="" history="1" highlightClick="0" endSnd="0">
+                  <a:extLst>
+                    <a:ext uri="{A12FA001-AC4F-418D-AE19-62706E023703}">
+                      <ahyp:hlinkClr xmlns:ahyp="http://schemas.microsoft.com/office/drawing/2018/hyperlinkcolor" val="tx"/>
+                    </a:ext>
+                  </a:extLst>
+                </a:hlinkClick>
+              </a:rPr>
+              <a:t>uklonskiy.k@ya.ru</a:t>
+            </a:r>
+            <a:endParaRPr lang="en-US" sz="2000" dirty="0"/>
+          </a:p>
+        </p:txBody>
+      </p:sp>
+      <p:sp>
+        <p:nvSpPr>
+          <p:cNvPr id="10" name="Text 8"/>
+          <p:cNvSpPr txBox="1"/>
+          <p:nvPr/>
+        </p:nvSpPr>
+        <p:spPr>
+          <a:xfrm>
+            <a:off x="886968" y="3566160"/>
+            <a:ext cx="4596232" cy="2468880"/>
+          </a:xfrm>
+          <a:prstGeom prst="rect">
+            <a:avLst/>
+          </a:prstGeom>
+          <a:noFill/>
+          <a:ln/>
+        </p:spPr>
+        <p:txBody>
+          <a:bodyPr wrap="square" lIns="0" tIns="0" rIns="0" bIns="0" rtlCol="0" anchor="t"/>
+          <a:lstStyle/>
+          <a:p>
+            <a:pPr marL="152400" indent="-152400">
+              <a:lnSpc>
+                <a:spcPct val="108000"/>
+              </a:lnSpc>
+              <a:spcAft>
+                <a:spcPts val="800"/>
+              </a:spcAft>
+              <a:buSzPct val="100000"/>
+              <a:buChar char="•"/>
+            </a:pPr>
+            <a:r>
+              <a:rPr lang="en-US" sz="1600" dirty="0">
+                <a:solidFill>
+                  <a:srgbClr val="1B2140"/>
+                </a:solidFill>
+                <a:latin typeface="Segoe UI" pitchFamily="34" charset="0"/>
+                <a:ea typeface="Segoe UI" pitchFamily="34" charset="-122"/>
+                <a:cs typeface="Segoe UI" pitchFamily="34" charset="-120"/>
+              </a:rPr>
+              <a:t>«ФинАналитик», Роспатент № 2024618827: учёт 10 млрд ₽ в год</a:t>
+            </a:r>
+            <a:endParaRPr lang="en-US" sz="1600" dirty="0"/>
+          </a:p>
+          <a:p>
+            <a:pPr marL="152400" indent="-152400">
+              <a:lnSpc>
+                <a:spcPct val="108000"/>
+              </a:lnSpc>
+              <a:spcAft>
+                <a:spcPts val="800"/>
+              </a:spcAft>
+              <a:buSzPct val="100000"/>
+              <a:buChar char="•"/>
+            </a:pPr>
+            <a:r>
+              <a:rPr lang="en-US" sz="1600" dirty="0">
+                <a:solidFill>
+                  <a:srgbClr val="1B2140"/>
+                </a:solidFill>
+                <a:latin typeface="Segoe UI" pitchFamily="34" charset="0"/>
+                <a:ea typeface="Segoe UI" pitchFamily="34" charset="-122"/>
+                <a:cs typeface="Segoe UI" pitchFamily="34" charset="-120"/>
+              </a:rPr>
+              <a:t>РАНХиГС, госуправление. Преподаватель РЭУ им. Плеханова</a:t>
+            </a:r>
+            <a:endParaRPr lang="en-US" sz="1600" dirty="0"/>
+          </a:p>
+          <a:p>
+            <a:pPr marL="152400" indent="-152400">
+              <a:lnSpc>
+                <a:spcPct val="108000"/>
+              </a:lnSpc>
+              <a:spcAft>
+                <a:spcPts val="800"/>
+              </a:spcAft>
+              <a:buSzPct val="100000"/>
+              <a:buChar char="•"/>
+            </a:pPr>
+            <a:r>
+              <a:rPr lang="en-US" sz="1600" dirty="0">
+                <a:solidFill>
+                  <a:srgbClr val="1B2140"/>
+                </a:solidFill>
+                <a:latin typeface="Segoe UI" pitchFamily="34" charset="0"/>
+                <a:ea typeface="Segoe UI" pitchFamily="34" charset="-122"/>
+                <a:cs typeface="Segoe UI" pitchFamily="34" charset="-120"/>
+              </a:rPr>
+              <a:t>Господдержка, структурирование сделок, переговоры с властью</a:t>
+            </a:r>
+            <a:endParaRPr lang="en-US" sz="1600" dirty="0"/>
+          </a:p>
+        </p:txBody>
+      </p:sp>
+      <p:sp>
+        <p:nvSpPr>
+          <p:cNvPr id="11" name="Shape 9"/>
+          <p:cNvSpPr/>
+          <p:nvPr/>
+        </p:nvSpPr>
+        <p:spPr>
+          <a:xfrm>
+            <a:off x="6324448" y="1481328"/>
+            <a:ext cx="5364328" cy="4709160"/>
+          </a:xfrm>
+          <a:prstGeom prst="roundRect">
+            <a:avLst>
+              <a:gd name="adj" fmla="val 1748"/>
             </a:avLst>
           </a:prstGeom>
           <a:solidFill>
@@ -2264,16 +2449,16 @@
       </p:sp>
       <p:sp>
         <p:nvSpPr>
-          <p:cNvPr id="6" name="Shape 4"/>
+          <p:cNvPr id="12" name="Shape 10"/>
           <p:cNvSpPr/>
           <p:nvPr/>
         </p:nvSpPr>
         <p:spPr>
           <a:xfrm>
-            <a:off x="795528" y="1719072"/>
-            <a:ext cx="384048" cy="384048"/>
-          </a:xfrm>
-          <a:prstGeom prst="ellipse">
+            <a:off x="6690208" y="1810512"/>
+            <a:ext cx="457200" cy="54864"/>
+          </a:xfrm>
+          <a:prstGeom prst="rect">
             <a:avLst/>
           </a:prstGeom>
           <a:solidFill>
@@ -2284,14 +2469,14 @@
       </p:sp>
       <p:sp>
         <p:nvSpPr>
-          <p:cNvPr id="7" name="Text 5"/>
-          <p:cNvSpPr txBox="1"/>
-          <p:nvPr/>
-        </p:nvSpPr>
-        <p:spPr>
-          <a:xfrm>
-            <a:off x="795528" y="1719072"/>
-            <a:ext cx="384048" cy="384048"/>
+          <p:cNvPr id="13" name="Text 11"/>
+          <p:cNvSpPr txBox="1"/>
+          <p:nvPr/>
+        </p:nvSpPr>
+        <p:spPr>
+          <a:xfrm>
+            <a:off x="6690208" y="2011680"/>
+            <a:ext cx="4632808" cy="502920"/>
           </a:xfrm>
           <a:prstGeom prst="rect">
             <a:avLst/>
@@ -2303,815 +2488,58 @@
           <a:bodyPr wrap="square" lIns="0" tIns="0" rIns="0" bIns="0" rtlCol="0" anchor="ctr"/>
           <a:lstStyle/>
           <a:p>
-            <a:pPr algn="ctr" indent="0" marL="0">
-              <a:buNone/>
-            </a:pPr>
-            <a:r>
-              <a:rPr lang="en-US" sz="1600" dirty="0">
-                <a:solidFill>
-                  <a:srgbClr val="FFFFFF"/>
+            <a:pPr indent="0" marL="0">
+              <a:buNone/>
+            </a:pPr>
+            <a:r>
+              <a:rPr lang="en-US" sz="3000" dirty="0">
+                <a:solidFill>
+                  <a:srgbClr val="1E2761"/>
                 </a:solidFill>
                 <a:latin typeface="Segoe UI Semibold" pitchFamily="34" charset="0"/>
                 <a:ea typeface="Segoe UI Semibold" pitchFamily="34" charset="-122"/>
                 <a:cs typeface="Segoe UI Semibold" pitchFamily="34" charset="-120"/>
               </a:rPr>
-              <a:t>1</a:t>
-            </a:r>
-            <a:endParaRPr lang="en-US" sz="1600" dirty="0"/>
-          </a:p>
-        </p:txBody>
-      </p:sp>
-      <p:sp>
-        <p:nvSpPr>
-          <p:cNvPr id="8" name="Text 6"/>
-          <p:cNvSpPr txBox="1"/>
-          <p:nvPr/>
-        </p:nvSpPr>
-        <p:spPr>
-          <a:xfrm>
-            <a:off x="795528" y="2194560"/>
-            <a:ext cx="4852264" cy="365760"/>
-          </a:xfrm>
-          <a:prstGeom prst="rect">
-            <a:avLst/>
-          </a:prstGeom>
-          <a:noFill/>
-          <a:ln/>
-        </p:spPr>
-        <p:txBody>
-          <a:bodyPr wrap="square" lIns="0" tIns="0" rIns="0" bIns="0" rtlCol="0" anchor="t"/>
-          <a:lstStyle/>
-          <a:p>
-            <a:pPr indent="0" marL="0">
-              <a:lnSpc>
-                <a:spcPct val="102000"/>
-              </a:lnSpc>
-              <a:buNone/>
-            </a:pPr>
-            <a:r>
-              <a:rPr lang="en-US" sz="2000" dirty="0">
-                <a:solidFill>
-                  <a:srgbClr val="1E2761"/>
+              <a:t>Данила Кашев</a:t>
+            </a:r>
+            <a:endParaRPr lang="en-US" sz="3000" dirty="0"/>
+          </a:p>
+        </p:txBody>
+      </p:sp>
+      <p:sp>
+        <p:nvSpPr>
+          <p:cNvPr id="14" name="Text 12"/>
+          <p:cNvSpPr txBox="1"/>
+          <p:nvPr/>
+        </p:nvSpPr>
+        <p:spPr>
+          <a:xfrm>
+            <a:off x="6690208" y="2578608"/>
+            <a:ext cx="4632808" cy="274320"/>
+          </a:xfrm>
+          <a:prstGeom prst="rect">
+            <a:avLst/>
+          </a:prstGeom>
+          <a:noFill/>
+          <a:ln/>
+        </p:spPr>
+        <p:txBody>
+          <a:bodyPr wrap="square" lIns="0" tIns="0" rIns="0" bIns="0" rtlCol="0" anchor="ctr"/>
+          <a:lstStyle/>
+          <a:p>
+            <a:pPr indent="0" marL="0">
+              <a:buNone/>
+            </a:pPr>
+            <a:r>
+              <a:rPr lang="en-US" sz="1300" spc="200" kern="0" dirty="0">
+                <a:solidFill>
+                  <a:srgbClr val="B4552D"/>
                 </a:solidFill>
                 <a:latin typeface="Segoe UI Semibold" pitchFamily="34" charset="0"/>
                 <a:ea typeface="Segoe UI Semibold" pitchFamily="34" charset="-122"/>
                 <a:cs typeface="Segoe UI Semibold" pitchFamily="34" charset="-120"/>
               </a:rPr>
-              <a:t>Одна задача на пробу</a:t>
-            </a:r>
-            <a:endParaRPr lang="en-US" sz="2000" dirty="0"/>
-          </a:p>
-        </p:txBody>
-      </p:sp>
-      <p:sp>
-        <p:nvSpPr>
-          <p:cNvPr id="9" name="Text 7"/>
-          <p:cNvSpPr txBox="1"/>
-          <p:nvPr/>
-        </p:nvSpPr>
-        <p:spPr>
-          <a:xfrm>
-            <a:off x="795528" y="2633472"/>
-            <a:ext cx="4852264" cy="777240"/>
-          </a:xfrm>
-          <a:prstGeom prst="rect">
-            <a:avLst/>
-          </a:prstGeom>
-          <a:noFill/>
-          <a:ln/>
-        </p:spPr>
-        <p:txBody>
-          <a:bodyPr wrap="square" lIns="0" tIns="0" rIns="0" bIns="0" rtlCol="0" anchor="t"/>
-          <a:lstStyle/>
-          <a:p>
-            <a:pPr indent="0" marL="0">
-              <a:lnSpc>
-                <a:spcPct val="108000"/>
-              </a:lnSpc>
-              <a:buNone/>
-            </a:pPr>
-            <a:r>
-              <a:rPr lang="en-US" sz="1600" dirty="0">
-                <a:solidFill>
-                  <a:srgbClr val="1B2140"/>
-                </a:solidFill>
-                <a:latin typeface="Segoe UI" pitchFamily="34" charset="0"/>
-                <a:ea typeface="Segoe UI" pitchFamily="34" charset="-122"/>
-                <a:cs typeface="Segoe UI" pitchFamily="34" charset="-120"/>
-              </a:rPr>
-              <a:t>Берём непрофильную задачу из вашего потока и делаем подбор за свой счёт</a:t>
-            </a:r>
-            <a:endParaRPr lang="en-US" sz="1600" dirty="0"/>
-          </a:p>
-        </p:txBody>
-      </p:sp>
-      <p:sp>
-        <p:nvSpPr>
-          <p:cNvPr id="10" name="Shape 8"/>
-          <p:cNvSpPr/>
-          <p:nvPr/>
-        </p:nvSpPr>
-        <p:spPr>
-          <a:xfrm>
-            <a:off x="6251296" y="1481328"/>
-            <a:ext cx="5437480" cy="2075688"/>
-          </a:xfrm>
-          <a:prstGeom prst="roundRect">
-            <a:avLst>
-              <a:gd name="adj" fmla="val 3965"/>
-            </a:avLst>
-          </a:prstGeom>
-          <a:solidFill>
-            <a:srgbClr val="FFFFFF"/>
-          </a:solidFill>
-          <a:ln w="22225">
-            <a:solidFill>
-              <a:srgbClr val="B4552D"/>
-            </a:solidFill>
-            <a:prstDash val="solid"/>
-          </a:ln>
-          <a:effectLst>
-            <a:outerShdw sx="100000" sy="100000" kx="0" ky="0" algn="bl" rotWithShape="0" blurRad="177800" dist="50800" dir="5400000">
-              <a:srgbClr val="7E88A8">
-                <a:alpha val="30000"/>
-              </a:srgbClr>
-            </a:outerShdw>
-          </a:effectLst>
-        </p:spPr>
-      </p:sp>
-      <p:sp>
-        <p:nvSpPr>
-          <p:cNvPr id="11" name="Shape 9"/>
-          <p:cNvSpPr/>
-          <p:nvPr/>
-        </p:nvSpPr>
-        <p:spPr>
-          <a:xfrm>
-            <a:off x="6543904" y="1719072"/>
-            <a:ext cx="384048" cy="384048"/>
-          </a:xfrm>
-          <a:prstGeom prst="ellipse">
-            <a:avLst/>
-          </a:prstGeom>
-          <a:solidFill>
-            <a:srgbClr val="B4552D"/>
-          </a:solidFill>
-          <a:ln/>
-        </p:spPr>
-      </p:sp>
-      <p:sp>
-        <p:nvSpPr>
-          <p:cNvPr id="12" name="Text 10"/>
-          <p:cNvSpPr txBox="1"/>
-          <p:nvPr/>
-        </p:nvSpPr>
-        <p:spPr>
-          <a:xfrm>
-            <a:off x="6543904" y="1719072"/>
-            <a:ext cx="384048" cy="384048"/>
-          </a:xfrm>
-          <a:prstGeom prst="rect">
-            <a:avLst/>
-          </a:prstGeom>
-          <a:noFill/>
-          <a:ln/>
-        </p:spPr>
-        <p:txBody>
-          <a:bodyPr wrap="square" lIns="0" tIns="0" rIns="0" bIns="0" rtlCol="0" anchor="ctr"/>
-          <a:lstStyle/>
-          <a:p>
-            <a:pPr algn="ctr" indent="0" marL="0">
-              <a:buNone/>
-            </a:pPr>
-            <a:r>
-              <a:rPr lang="en-US" sz="1600" dirty="0">
-                <a:solidFill>
-                  <a:srgbClr val="FFFFFF"/>
-                </a:solidFill>
-                <a:latin typeface="Segoe UI Semibold" pitchFamily="34" charset="0"/>
-                <a:ea typeface="Segoe UI Semibold" pitchFamily="34" charset="-122"/>
-                <a:cs typeface="Segoe UI Semibold" pitchFamily="34" charset="-120"/>
-              </a:rPr>
-              <a:t>2</a:t>
-            </a:r>
-            <a:endParaRPr lang="en-US" sz="1600" dirty="0"/>
-          </a:p>
-        </p:txBody>
-      </p:sp>
-      <p:sp>
-        <p:nvSpPr>
-          <p:cNvPr id="13" name="Text 11"/>
-          <p:cNvSpPr txBox="1"/>
-          <p:nvPr/>
-        </p:nvSpPr>
-        <p:spPr>
-          <a:xfrm>
-            <a:off x="6543904" y="2194560"/>
-            <a:ext cx="4852264" cy="365760"/>
-          </a:xfrm>
-          <a:prstGeom prst="rect">
-            <a:avLst/>
-          </a:prstGeom>
-          <a:noFill/>
-          <a:ln/>
-        </p:spPr>
-        <p:txBody>
-          <a:bodyPr wrap="square" lIns="0" tIns="0" rIns="0" bIns="0" rtlCol="0" anchor="t"/>
-          <a:lstStyle/>
-          <a:p>
-            <a:pPr indent="0" marL="0">
-              <a:lnSpc>
-                <a:spcPct val="102000"/>
-              </a:lnSpc>
-              <a:buNone/>
-            </a:pPr>
-            <a:r>
-              <a:rPr lang="en-US" sz="2000" dirty="0">
-                <a:solidFill>
-                  <a:srgbClr val="1E2761"/>
-                </a:solidFill>
-                <a:latin typeface="Segoe UI Semibold" pitchFamily="34" charset="0"/>
-                <a:ea typeface="Segoe UI Semibold" pitchFamily="34" charset="-122"/>
-                <a:cs typeface="Segoe UI Semibold" pitchFamily="34" charset="-120"/>
-              </a:rPr>
-              <a:t>Встречный поток</a:t>
-            </a:r>
-            <a:endParaRPr lang="en-US" sz="2000" dirty="0"/>
-          </a:p>
-        </p:txBody>
-      </p:sp>
-      <p:sp>
-        <p:nvSpPr>
-          <p:cNvPr id="14" name="Text 12"/>
-          <p:cNvSpPr txBox="1"/>
-          <p:nvPr/>
-        </p:nvSpPr>
-        <p:spPr>
-          <a:xfrm>
-            <a:off x="6543904" y="2633472"/>
-            <a:ext cx="4852264" cy="777240"/>
-          </a:xfrm>
-          <a:prstGeom prst="rect">
-            <a:avLst/>
-          </a:prstGeom>
-          <a:noFill/>
-          <a:ln/>
-        </p:spPr>
-        <p:txBody>
-          <a:bodyPr wrap="square" lIns="0" tIns="0" rIns="0" bIns="0" rtlCol="0" anchor="t"/>
-          <a:lstStyle/>
-          <a:p>
-            <a:pPr indent="0" marL="0">
-              <a:lnSpc>
-                <a:spcPct val="108000"/>
-              </a:lnSpc>
-              <a:buNone/>
-            </a:pPr>
-            <a:r>
-              <a:rPr lang="en-US" sz="1600" dirty="0">
-                <a:solidFill>
-                  <a:srgbClr val="1B2140"/>
-                </a:solidFill>
-                <a:latin typeface="Segoe UI" pitchFamily="34" charset="0"/>
-                <a:ea typeface="Segoe UI" pitchFamily="34" charset="-122"/>
-                <a:cs typeface="Segoe UI" pitchFamily="34" charset="-120"/>
-              </a:rPr>
-              <a:t>Первую ИТ-задачу с наших предприятий отдаём вам</a:t>
-            </a:r>
-            <a:endParaRPr lang="en-US" sz="1600" dirty="0"/>
-          </a:p>
-        </p:txBody>
-      </p:sp>
-      <p:sp>
-        <p:nvSpPr>
-          <p:cNvPr id="15" name="Shape 13"/>
-          <p:cNvSpPr/>
-          <p:nvPr/>
-        </p:nvSpPr>
-        <p:spPr>
-          <a:xfrm>
-            <a:off x="502920" y="3867912"/>
-            <a:ext cx="5437480" cy="2075688"/>
-          </a:xfrm>
-          <a:prstGeom prst="roundRect">
-            <a:avLst>
-              <a:gd name="adj" fmla="val 3965"/>
-            </a:avLst>
-          </a:prstGeom>
-          <a:solidFill>
-            <a:srgbClr val="FFFFFF"/>
-          </a:solidFill>
-          <a:ln w="12700">
-            <a:solidFill>
-              <a:srgbClr val="C9D3EA"/>
-            </a:solidFill>
-            <a:prstDash val="solid"/>
-          </a:ln>
-          <a:effectLst>
-            <a:outerShdw sx="100000" sy="100000" kx="0" ky="0" algn="bl" rotWithShape="0" blurRad="177800" dist="50800" dir="5400000">
-              <a:srgbClr val="7E88A8">
-                <a:alpha val="30000"/>
-              </a:srgbClr>
-            </a:outerShdw>
-          </a:effectLst>
-        </p:spPr>
-      </p:sp>
-      <p:sp>
-        <p:nvSpPr>
-          <p:cNvPr id="16" name="Shape 14"/>
-          <p:cNvSpPr/>
-          <p:nvPr/>
-        </p:nvSpPr>
-        <p:spPr>
-          <a:xfrm>
-            <a:off x="795528" y="4105656"/>
-            <a:ext cx="384048" cy="384048"/>
-          </a:xfrm>
-          <a:prstGeom prst="ellipse">
-            <a:avLst/>
-          </a:prstGeom>
-          <a:solidFill>
-            <a:srgbClr val="1E2761"/>
-          </a:solidFill>
-          <a:ln/>
-        </p:spPr>
-      </p:sp>
-      <p:sp>
-        <p:nvSpPr>
-          <p:cNvPr id="17" name="Text 15"/>
-          <p:cNvSpPr txBox="1"/>
-          <p:nvPr/>
-        </p:nvSpPr>
-        <p:spPr>
-          <a:xfrm>
-            <a:off x="795528" y="4105656"/>
-            <a:ext cx="384048" cy="384048"/>
-          </a:xfrm>
-          <a:prstGeom prst="rect">
-            <a:avLst/>
-          </a:prstGeom>
-          <a:noFill/>
-          <a:ln/>
-        </p:spPr>
-        <p:txBody>
-          <a:bodyPr wrap="square" lIns="0" tIns="0" rIns="0" bIns="0" rtlCol="0" anchor="ctr"/>
-          <a:lstStyle/>
-          <a:p>
-            <a:pPr algn="ctr" indent="0" marL="0">
-              <a:buNone/>
-            </a:pPr>
-            <a:r>
-              <a:rPr lang="en-US" sz="1600" dirty="0">
-                <a:solidFill>
-                  <a:srgbClr val="FFFFFF"/>
-                </a:solidFill>
-                <a:latin typeface="Segoe UI Semibold" pitchFamily="34" charset="0"/>
-                <a:ea typeface="Segoe UI Semibold" pitchFamily="34" charset="-122"/>
-                <a:cs typeface="Segoe UI Semibold" pitchFamily="34" charset="-120"/>
-              </a:rPr>
-              <a:t>3</a:t>
-            </a:r>
-            <a:endParaRPr lang="en-US" sz="1600" dirty="0"/>
-          </a:p>
-        </p:txBody>
-      </p:sp>
-      <p:sp>
-        <p:nvSpPr>
-          <p:cNvPr id="18" name="Text 16"/>
-          <p:cNvSpPr txBox="1"/>
-          <p:nvPr/>
-        </p:nvSpPr>
-        <p:spPr>
-          <a:xfrm>
-            <a:off x="795528" y="4581144"/>
-            <a:ext cx="4852264" cy="365760"/>
-          </a:xfrm>
-          <a:prstGeom prst="rect">
-            <a:avLst/>
-          </a:prstGeom>
-          <a:noFill/>
-          <a:ln/>
-        </p:spPr>
-        <p:txBody>
-          <a:bodyPr wrap="square" lIns="0" tIns="0" rIns="0" bIns="0" rtlCol="0" anchor="t"/>
-          <a:lstStyle/>
-          <a:p>
-            <a:pPr indent="0" marL="0">
-              <a:lnSpc>
-                <a:spcPct val="102000"/>
-              </a:lnSpc>
-              <a:buNone/>
-            </a:pPr>
-            <a:r>
-              <a:rPr lang="en-US" sz="2000" dirty="0">
-                <a:solidFill>
-                  <a:srgbClr val="1E2761"/>
-                </a:solidFill>
-                <a:latin typeface="Segoe UI Semibold" pitchFamily="34" charset="0"/>
-                <a:ea typeface="Segoe UI Semibold" pitchFamily="34" charset="-122"/>
-                <a:cs typeface="Segoe UI Semibold" pitchFamily="34" charset="-120"/>
-              </a:rPr>
-              <a:t>Три месяца смотрим</a:t>
-            </a:r>
-            <a:endParaRPr lang="en-US" sz="2000" dirty="0"/>
-          </a:p>
-        </p:txBody>
-      </p:sp>
-      <p:sp>
-        <p:nvSpPr>
-          <p:cNvPr id="19" name="Text 17"/>
-          <p:cNvSpPr txBox="1"/>
-          <p:nvPr/>
-        </p:nvSpPr>
-        <p:spPr>
-          <a:xfrm>
-            <a:off x="795528" y="5020056"/>
-            <a:ext cx="4852264" cy="777240"/>
-          </a:xfrm>
-          <a:prstGeom prst="rect">
-            <a:avLst/>
-          </a:prstGeom>
-          <a:noFill/>
-          <a:ln/>
-        </p:spPr>
-        <p:txBody>
-          <a:bodyPr wrap="square" lIns="0" tIns="0" rIns="0" bIns="0" rtlCol="0" anchor="t"/>
-          <a:lstStyle/>
-          <a:p>
-            <a:pPr indent="0" marL="0">
-              <a:lnSpc>
-                <a:spcPct val="108000"/>
-              </a:lnSpc>
-              <a:buNone/>
-            </a:pPr>
-            <a:r>
-              <a:rPr lang="en-US" sz="1600" dirty="0">
-                <a:solidFill>
-                  <a:srgbClr val="1B2140"/>
-                </a:solidFill>
-                <a:latin typeface="Segoe UI" pitchFamily="34" charset="0"/>
-                <a:ea typeface="Segoe UI" pitchFamily="34" charset="-122"/>
-                <a:cs typeface="Segoe UI" pitchFamily="34" charset="-120"/>
-              </a:rPr>
-              <a:t>Ни договора, ни платежей, ни обязательств по объёму: проверяем, есть ли поток</a:t>
-            </a:r>
-            <a:endParaRPr lang="en-US" sz="1600" dirty="0"/>
-          </a:p>
-        </p:txBody>
-      </p:sp>
-      <p:sp>
-        <p:nvSpPr>
-          <p:cNvPr id="20" name="Shape 18"/>
-          <p:cNvSpPr/>
-          <p:nvPr/>
-        </p:nvSpPr>
-        <p:spPr>
-          <a:xfrm>
-            <a:off x="6251296" y="3867912"/>
-            <a:ext cx="5437480" cy="2075688"/>
-          </a:xfrm>
-          <a:prstGeom prst="roundRect">
-            <a:avLst>
-              <a:gd name="adj" fmla="val 3965"/>
-            </a:avLst>
-          </a:prstGeom>
-          <a:solidFill>
-            <a:srgbClr val="FFFFFF"/>
-          </a:solidFill>
-          <a:ln w="22225">
-            <a:solidFill>
-              <a:srgbClr val="B4552D"/>
-            </a:solidFill>
-            <a:prstDash val="solid"/>
-          </a:ln>
-          <a:effectLst>
-            <a:outerShdw sx="100000" sy="100000" kx="0" ky="0" algn="bl" rotWithShape="0" blurRad="177800" dist="50800" dir="5400000">
-              <a:srgbClr val="7E88A8">
-                <a:alpha val="30000"/>
-              </a:srgbClr>
-            </a:outerShdw>
-          </a:effectLst>
-        </p:spPr>
-      </p:sp>
-      <p:sp>
-        <p:nvSpPr>
-          <p:cNvPr id="21" name="Shape 19"/>
-          <p:cNvSpPr/>
-          <p:nvPr/>
-        </p:nvSpPr>
-        <p:spPr>
-          <a:xfrm>
-            <a:off x="6543904" y="4105656"/>
-            <a:ext cx="384048" cy="384048"/>
-          </a:xfrm>
-          <a:prstGeom prst="ellipse">
-            <a:avLst/>
-          </a:prstGeom>
-          <a:solidFill>
-            <a:srgbClr val="B4552D"/>
-          </a:solidFill>
-          <a:ln/>
-        </p:spPr>
-      </p:sp>
-      <p:sp>
-        <p:nvSpPr>
-          <p:cNvPr id="22" name="Text 20"/>
-          <p:cNvSpPr txBox="1"/>
-          <p:nvPr/>
-        </p:nvSpPr>
-        <p:spPr>
-          <a:xfrm>
-            <a:off x="6543904" y="4105656"/>
-            <a:ext cx="384048" cy="384048"/>
-          </a:xfrm>
-          <a:prstGeom prst="rect">
-            <a:avLst/>
-          </a:prstGeom>
-          <a:noFill/>
-          <a:ln/>
-        </p:spPr>
-        <p:txBody>
-          <a:bodyPr wrap="square" lIns="0" tIns="0" rIns="0" bIns="0" rtlCol="0" anchor="ctr"/>
-          <a:lstStyle/>
-          <a:p>
-            <a:pPr algn="ctr" indent="0" marL="0">
-              <a:buNone/>
-            </a:pPr>
-            <a:r>
-              <a:rPr lang="en-US" sz="1600" dirty="0">
-                <a:solidFill>
-                  <a:srgbClr val="FFFFFF"/>
-                </a:solidFill>
-                <a:latin typeface="Segoe UI Semibold" pitchFamily="34" charset="0"/>
-                <a:ea typeface="Segoe UI Semibold" pitchFamily="34" charset="-122"/>
-                <a:cs typeface="Segoe UI Semibold" pitchFamily="34" charset="-120"/>
-              </a:rPr>
-              <a:t>4</a:t>
-            </a:r>
-            <a:endParaRPr lang="en-US" sz="1600" dirty="0"/>
-          </a:p>
-        </p:txBody>
-      </p:sp>
-      <p:sp>
-        <p:nvSpPr>
-          <p:cNvPr id="23" name="Text 21"/>
-          <p:cNvSpPr txBox="1"/>
-          <p:nvPr/>
-        </p:nvSpPr>
-        <p:spPr>
-          <a:xfrm>
-            <a:off x="6543904" y="4581144"/>
-            <a:ext cx="4852264" cy="365760"/>
-          </a:xfrm>
-          <a:prstGeom prst="rect">
-            <a:avLst/>
-          </a:prstGeom>
-          <a:noFill/>
-          <a:ln/>
-        </p:spPr>
-        <p:txBody>
-          <a:bodyPr wrap="square" lIns="0" tIns="0" rIns="0" bIns="0" rtlCol="0" anchor="t"/>
-          <a:lstStyle/>
-          <a:p>
-            <a:pPr indent="0" marL="0">
-              <a:lnSpc>
-                <a:spcPct val="102000"/>
-              </a:lnSpc>
-              <a:buNone/>
-            </a:pPr>
-            <a:r>
-              <a:rPr lang="en-US" sz="2000" dirty="0">
-                <a:solidFill>
-                  <a:srgbClr val="1E2761"/>
-                </a:solidFill>
-                <a:latin typeface="Segoe UI Semibold" pitchFamily="34" charset="0"/>
-                <a:ea typeface="Segoe UI Semibold" pitchFamily="34" charset="-122"/>
-                <a:cs typeface="Segoe UI Semibold" pitchFamily="34" charset="-120"/>
-              </a:rPr>
-              <a:t>Дальше по результату</a:t>
-            </a:r>
-            <a:endParaRPr lang="en-US" sz="2000" dirty="0"/>
-          </a:p>
-        </p:txBody>
-      </p:sp>
-      <p:sp>
-        <p:nvSpPr>
-          <p:cNvPr id="24" name="Text 22"/>
-          <p:cNvSpPr txBox="1"/>
-          <p:nvPr/>
-        </p:nvSpPr>
-        <p:spPr>
-          <a:xfrm>
-            <a:off x="6543904" y="5020056"/>
-            <a:ext cx="4852264" cy="777240"/>
-          </a:xfrm>
-          <a:prstGeom prst="rect">
-            <a:avLst/>
-          </a:prstGeom>
-          <a:noFill/>
-          <a:ln/>
-        </p:spPr>
-        <p:txBody>
-          <a:bodyPr wrap="square" lIns="0" tIns="0" rIns="0" bIns="0" rtlCol="0" anchor="t"/>
-          <a:lstStyle/>
-          <a:p>
-            <a:pPr indent="0" marL="0">
-              <a:lnSpc>
-                <a:spcPct val="108000"/>
-              </a:lnSpc>
-              <a:buNone/>
-            </a:pPr>
-            <a:r>
-              <a:rPr lang="en-US" sz="1600" dirty="0">
-                <a:solidFill>
-                  <a:srgbClr val="1B2140"/>
-                </a:solidFill>
-                <a:latin typeface="Segoe UI" pitchFamily="34" charset="0"/>
-                <a:ea typeface="Segoe UI" pitchFamily="34" charset="-122"/>
-                <a:cs typeface="Segoe UI" pitchFamily="34" charset="-120"/>
-              </a:rPr>
-              <a:t>Поток есть — фиксируем письменно порядок передачи и вознаграждения</a:t>
-            </a:r>
-            <a:endParaRPr lang="en-US" sz="1600" dirty="0"/>
-          </a:p>
-        </p:txBody>
-      </p:sp>
-      <p:sp>
-        <p:nvSpPr>
-          <p:cNvPr id="25" name="Text 23"/>
-          <p:cNvSpPr txBox="1"/>
-          <p:nvPr/>
-        </p:nvSpPr>
-        <p:spPr>
-          <a:xfrm>
-            <a:off x="502920" y="6053328"/>
-            <a:ext cx="11185855" cy="329184"/>
-          </a:xfrm>
-          <a:prstGeom prst="rect">
-            <a:avLst/>
-          </a:prstGeom>
-          <a:noFill/>
-          <a:ln/>
-        </p:spPr>
-        <p:txBody>
-          <a:bodyPr wrap="square" lIns="0" tIns="0" rIns="0" bIns="0" rtlCol="0" anchor="ctr"/>
-          <a:lstStyle/>
-          <a:p>
-            <a:pPr indent="0" marL="0">
-              <a:buNone/>
-            </a:pPr>
-            <a:r>
-              <a:rPr lang="en-US" sz="1600" i="1" dirty="0">
-                <a:solidFill>
-                  <a:srgbClr val="6B7699"/>
-                </a:solidFill>
-                <a:latin typeface="Segoe UI" pitchFamily="34" charset="0"/>
-                <a:ea typeface="Segoe UI" pitchFamily="34" charset="-122"/>
-                <a:cs typeface="Segoe UI" pitchFamily="34" charset="-120"/>
-              </a:rPr>
-              <a:t>Вложений с вашей стороны нет. Условия вознаграждения обсуждаем голосом</a:t>
-            </a:r>
-            <a:endParaRPr lang="en-US" sz="1600" dirty="0"/>
-          </a:p>
-        </p:txBody>
-      </p:sp>
-      <p:sp>
-        <p:nvSpPr>
-          <p:cNvPr id="26" name="Text 24"/>
-          <p:cNvSpPr txBox="1"/>
-          <p:nvPr/>
-        </p:nvSpPr>
-        <p:spPr>
-          <a:xfrm>
-            <a:off x="502920" y="6473952"/>
-            <a:ext cx="1828800" cy="274320"/>
-          </a:xfrm>
-          <a:prstGeom prst="rect">
-            <a:avLst/>
-          </a:prstGeom>
-          <a:noFill/>
-          <a:ln/>
-        </p:spPr>
-        <p:txBody>
-          <a:bodyPr wrap="square" lIns="0" tIns="0" rIns="0" bIns="0" rtlCol="0" anchor="ctr"/>
-          <a:lstStyle/>
-          <a:p>
-            <a:pPr indent="0" marL="0">
-              <a:buNone/>
-            </a:pPr>
-            <a:r>
-              <a:rPr lang="en-US" sz="1200" dirty="0">
-                <a:solidFill>
-                  <a:srgbClr val="6B7699"/>
-                </a:solidFill>
-                <a:latin typeface="Segoe UI" pitchFamily="34" charset="0"/>
-                <a:ea typeface="Segoe UI" pitchFamily="34" charset="-122"/>
-                <a:cs typeface="Segoe UI" pitchFamily="34" charset="-120"/>
-              </a:rPr>
-              <a:t>Ситалл</a:t>
-            </a:r>
-            <a:endParaRPr lang="en-US" sz="1200" dirty="0"/>
-          </a:p>
-        </p:txBody>
-      </p:sp>
-      <p:sp>
-        <p:nvSpPr>
-          <p:cNvPr id="27" name="Text 25"/>
-          <p:cNvSpPr txBox="1"/>
-          <p:nvPr/>
-        </p:nvSpPr>
-        <p:spPr>
-          <a:xfrm>
-            <a:off x="10774375" y="6473952"/>
-            <a:ext cx="914400" cy="274320"/>
-          </a:xfrm>
-          <a:prstGeom prst="rect">
-            <a:avLst/>
-          </a:prstGeom>
-          <a:noFill/>
-          <a:ln/>
-        </p:spPr>
-        <p:txBody>
-          <a:bodyPr wrap="square" lIns="0" tIns="0" rIns="0" bIns="0" rtlCol="0" anchor="ctr"/>
-          <a:lstStyle/>
-          <a:p>
-            <a:pPr algn="r" indent="0" marL="0">
-              <a:buNone/>
-            </a:pPr>
-            <a:r>
-              <a:rPr lang="en-US" sz="1200" dirty="0">
-                <a:solidFill>
-                  <a:srgbClr val="6B7699"/>
-                </a:solidFill>
-                <a:latin typeface="Segoe UI" pitchFamily="34" charset="0"/>
-                <a:ea typeface="Segoe UI" pitchFamily="34" charset="-122"/>
-                <a:cs typeface="Segoe UI" pitchFamily="34" charset="-120"/>
-              </a:rPr>
-              <a:t>10 / 11</a:t>
-            </a:r>
-            <a:endParaRPr lang="en-US" sz="1200" dirty="0"/>
-          </a:p>
-        </p:txBody>
-      </p:sp>
-    </p:spTree>
-  </p:cSld>
-  <p:clrMapOvr>
-    <a:masterClrMapping/>
-  </p:clrMapOvr>
-</p:sld>
-</file>
-
-<file path=ppt/slides/slide11.xml><?xml version="1.0" encoding="utf-8"?>
-<p:sld xmlns:a="http://schemas.openxmlformats.org/drawingml/2006/main" xmlns:r="http://schemas.openxmlformats.org/officeDocument/2006/relationships" xmlns:p="http://schemas.openxmlformats.org/presentationml/2006/main">
-  <p:cSld name="Slide 11">
-    <p:spTree>
-      <p:nvGrpSpPr>
-        <p:cNvPr id="1" name=""/>
-        <p:cNvGrpSpPr/>
-        <p:nvPr/>
-      </p:nvGrpSpPr>
-      <p:grpSpPr>
-        <a:xfrm>
-          <a:off x="0" y="0"/>
-          <a:ext cx="0" cy="0"/>
-          <a:chOff x="0" y="0"/>
-          <a:chExt cx="0" cy="0"/>
-        </a:xfrm>
-      </p:grpSpPr>
-      <p:sp>
-        <p:nvSpPr>
-          <p:cNvPr id="2" name="Text 0"/>
-          <p:cNvSpPr txBox="1"/>
-          <p:nvPr/>
-        </p:nvSpPr>
-        <p:spPr>
-          <a:xfrm>
-            <a:off x="502920" y="219456"/>
-            <a:ext cx="11185855" cy="274320"/>
-          </a:xfrm>
-          <a:prstGeom prst="rect">
-            <a:avLst/>
-          </a:prstGeom>
-          <a:noFill/>
-          <a:ln/>
-        </p:spPr>
-        <p:txBody>
-          <a:bodyPr wrap="square" lIns="0" tIns="0" rIns="0" bIns="0" rtlCol="0" anchor="ctr"/>
-          <a:lstStyle/>
-          <a:p>
-            <a:pPr indent="0" marL="0">
-              <a:buNone/>
-            </a:pPr>
-            <a:r>
-              <a:rPr lang="en-US" sz="1300" spc="300" kern="0" dirty="0">
-                <a:solidFill>
-                  <a:srgbClr val="B4552D"/>
-                </a:solidFill>
-                <a:latin typeface="Segoe UI Semibold" pitchFamily="34" charset="0"/>
-                <a:ea typeface="Segoe UI Semibold" pitchFamily="34" charset="-122"/>
-                <a:cs typeface="Segoe UI Semibold" pitchFamily="34" charset="-120"/>
-              </a:rPr>
-              <a:t>КОНТАКТЫ</a:t>
+              <a:t>СО-ОСНОВАТЕЛЬ</a:t>
             </a:r>
             <a:endParaRPr lang="en-US" sz="1300" dirty="0"/>
           </a:p>
@@ -3119,253 +2547,14 @@
       </p:sp>
       <p:sp>
         <p:nvSpPr>
-          <p:cNvPr id="3" name="Text 1"/>
-          <p:cNvSpPr txBox="1"/>
-          <p:nvPr/>
-        </p:nvSpPr>
-        <p:spPr>
-          <a:xfrm>
-            <a:off x="484632" y="512064"/>
-            <a:ext cx="11185855" cy="566928"/>
-          </a:xfrm>
-          <a:prstGeom prst="rect">
-            <a:avLst/>
-          </a:prstGeom>
-          <a:noFill/>
-          <a:ln/>
-        </p:spPr>
-        <p:txBody>
-          <a:bodyPr wrap="square" lIns="0" tIns="0" rIns="0" bIns="0" rtlCol="0" anchor="ctr"/>
-          <a:lstStyle/>
-          <a:p>
-            <a:pPr indent="0" marL="0">
-              <a:buNone/>
-            </a:pPr>
-            <a:r>
-              <a:rPr lang="en-US" sz="2700" dirty="0">
-                <a:solidFill>
-                  <a:srgbClr val="1E2761"/>
-                </a:solidFill>
-                <a:latin typeface="Segoe UI Semibold" pitchFamily="34" charset="0"/>
-                <a:ea typeface="Segoe UI Semibold" pitchFamily="34" charset="-122"/>
-                <a:cs typeface="Segoe UI Semibold" pitchFamily="34" charset="-120"/>
-              </a:rPr>
-              <a:t>С кем разговаривать</a:t>
-            </a:r>
-            <a:endParaRPr lang="en-US" sz="2700" dirty="0"/>
-          </a:p>
-        </p:txBody>
-      </p:sp>
-      <p:sp>
-        <p:nvSpPr>
-          <p:cNvPr id="4" name="Shape 2"/>
-          <p:cNvSpPr/>
-          <p:nvPr/>
-        </p:nvSpPr>
-        <p:spPr>
-          <a:xfrm>
-            <a:off x="502920" y="1133856"/>
-            <a:ext cx="1097280" cy="64008"/>
-          </a:xfrm>
-          <a:prstGeom prst="rect">
-            <a:avLst/>
-          </a:prstGeom>
-          <a:solidFill>
-            <a:srgbClr val="B4552D"/>
-          </a:solidFill>
-          <a:ln/>
-        </p:spPr>
-      </p:sp>
-      <p:sp>
-        <p:nvSpPr>
-          <p:cNvPr id="5" name="Shape 3"/>
-          <p:cNvSpPr/>
-          <p:nvPr/>
-        </p:nvSpPr>
-        <p:spPr>
-          <a:xfrm>
-            <a:off x="502920" y="1481328"/>
-            <a:ext cx="5364328" cy="4709160"/>
-          </a:xfrm>
-          <a:prstGeom prst="roundRect">
-            <a:avLst>
-              <a:gd name="adj" fmla="val 1748"/>
-            </a:avLst>
-          </a:prstGeom>
-          <a:solidFill>
-            <a:srgbClr val="FFFFFF"/>
-          </a:solidFill>
-          <a:ln w="22225">
-            <a:solidFill>
-              <a:srgbClr val="B4552D"/>
-            </a:solidFill>
-            <a:prstDash val="solid"/>
-          </a:ln>
-          <a:effectLst>
-            <a:outerShdw sx="100000" sy="100000" kx="0" ky="0" algn="bl" rotWithShape="0" blurRad="177800" dist="50800" dir="5400000">
-              <a:srgbClr val="7E88A8">
-                <a:alpha val="30000"/>
-              </a:srgbClr>
-            </a:outerShdw>
-          </a:effectLst>
-        </p:spPr>
-      </p:sp>
-      <p:sp>
-        <p:nvSpPr>
-          <p:cNvPr id="6" name="Shape 4"/>
-          <p:cNvSpPr/>
-          <p:nvPr/>
-        </p:nvSpPr>
-        <p:spPr>
-          <a:xfrm>
-            <a:off x="868680" y="1810512"/>
-            <a:ext cx="457200" cy="54864"/>
-          </a:xfrm>
-          <a:prstGeom prst="rect">
-            <a:avLst/>
-          </a:prstGeom>
-          <a:solidFill>
-            <a:srgbClr val="B4552D"/>
-          </a:solidFill>
-          <a:ln/>
-        </p:spPr>
-      </p:sp>
-      <p:sp>
-        <p:nvSpPr>
-          <p:cNvPr id="7" name="Text 5"/>
-          <p:cNvSpPr txBox="1"/>
-          <p:nvPr/>
-        </p:nvSpPr>
-        <p:spPr>
-          <a:xfrm>
-            <a:off x="868680" y="2011680"/>
-            <a:ext cx="4632808" cy="502920"/>
-          </a:xfrm>
-          <a:prstGeom prst="rect">
-            <a:avLst/>
-          </a:prstGeom>
-          <a:noFill/>
-          <a:ln/>
-        </p:spPr>
-        <p:txBody>
-          <a:bodyPr wrap="square" lIns="0" tIns="0" rIns="0" bIns="0" rtlCol="0" anchor="ctr"/>
-          <a:lstStyle/>
-          <a:p>
-            <a:pPr indent="0" marL="0">
-              <a:buNone/>
-            </a:pPr>
-            <a:r>
-              <a:rPr lang="en-US" sz="3000" dirty="0">
-                <a:solidFill>
-                  <a:srgbClr val="1E2761"/>
-                </a:solidFill>
-                <a:latin typeface="Segoe UI Semibold" pitchFamily="34" charset="0"/>
-                <a:ea typeface="Segoe UI Semibold" pitchFamily="34" charset="-122"/>
-                <a:cs typeface="Segoe UI Semibold" pitchFamily="34" charset="-120"/>
-              </a:rPr>
-              <a:t>Кирилл Уклонский</a:t>
-            </a:r>
-            <a:endParaRPr lang="en-US" sz="3000" dirty="0"/>
-          </a:p>
-        </p:txBody>
-      </p:sp>
-      <p:sp>
-        <p:nvSpPr>
-          <p:cNvPr id="8" name="Text 6"/>
-          <p:cNvSpPr txBox="1"/>
-          <p:nvPr/>
-        </p:nvSpPr>
-        <p:spPr>
-          <a:xfrm>
-            <a:off x="868680" y="2578608"/>
-            <a:ext cx="4632808" cy="274320"/>
-          </a:xfrm>
-          <a:prstGeom prst="rect">
-            <a:avLst/>
-          </a:prstGeom>
-          <a:noFill/>
-          <a:ln/>
-        </p:spPr>
-        <p:txBody>
-          <a:bodyPr wrap="square" lIns="0" tIns="0" rIns="0" bIns="0" rtlCol="0" anchor="ctr"/>
-          <a:lstStyle/>
-          <a:p>
-            <a:pPr indent="0" marL="0">
-              <a:buNone/>
-            </a:pPr>
-            <a:r>
-              <a:rPr lang="en-US" sz="1300" spc="200" kern="0" dirty="0">
-                <a:solidFill>
-                  <a:srgbClr val="B4552D"/>
-                </a:solidFill>
-                <a:latin typeface="Segoe UI Semibold" pitchFamily="34" charset="0"/>
-                <a:ea typeface="Segoe UI Semibold" pitchFamily="34" charset="-122"/>
-                <a:cs typeface="Segoe UI Semibold" pitchFamily="34" charset="-120"/>
-              </a:rPr>
-              <a:t>СО-ОСНОВАТЕЛЬ</a:t>
-            </a:r>
-            <a:endParaRPr lang="en-US" sz="1300" dirty="0"/>
-          </a:p>
-        </p:txBody>
-      </p:sp>
-      <p:sp>
-        <p:nvSpPr>
-          <p:cNvPr id="9" name="Text 7">
-            <a:hlinkClick r:id="rId1" tooltip=""/>
-          </p:cNvPr>
-          <p:cNvSpPr txBox="1"/>
-          <p:nvPr/>
-        </p:nvSpPr>
-        <p:spPr>
-          <a:xfrm>
-            <a:off x="868680" y="2971800"/>
-            <a:ext cx="4632808" cy="384048"/>
-          </a:xfrm>
-          <a:prstGeom prst="rect">
-            <a:avLst/>
-          </a:prstGeom>
-          <a:noFill/>
-          <a:ln/>
-        </p:spPr>
-        <p:txBody>
-          <a:bodyPr wrap="square" lIns="0" tIns="0" rIns="0" bIns="0" rtlCol="0" anchor="ctr"/>
-          <a:lstStyle/>
-          <a:p>
-            <a:pPr indent="0" marL="0">
-              <a:buNone/>
-            </a:pPr>
-            <a:r>
-              <a:rPr lang="en-US" sz="2000" u="sng" dirty="0">
-                <a:solidFill>
-                  <a:srgbClr val="1E2761"/>
-                </a:solidFill>
-                <a:latin typeface="Segoe UI Semibold" pitchFamily="34" charset="0"/>
-                <a:ea typeface="Segoe UI Semibold" pitchFamily="34" charset="-122"/>
-                <a:cs typeface="Segoe UI Semibold" pitchFamily="34" charset="-120"/>
-                <a:hlinkClick r:id="rId1" invalidUrl="" action="" tgtFrame="" tooltip="" history="1" highlightClick="0" endSnd="0">
-                  <a:extLst>
-                    <a:ext uri="{A12FA001-AC4F-418D-AE19-62706E023703}">
-                      <ahyp:hlinkClr xmlns:ahyp="http://schemas.microsoft.com/office/drawing/2018/hyperlinkcolor" val="tx"/>
-                    </a:ext>
-                  </a:extLst>
-                </a:hlinkClick>
-              </a:rPr>
-              <a:t>uklonskiy.k@ya.ru</a:t>
-            </a:r>
-            <a:endParaRPr lang="en-US" sz="2000" dirty="0"/>
-          </a:p>
-        </p:txBody>
-      </p:sp>
-      <p:sp>
-        <p:nvSpPr>
-          <p:cNvPr id="10" name="Text 8"/>
-          <p:cNvSpPr txBox="1"/>
-          <p:nvPr/>
-        </p:nvSpPr>
-        <p:spPr>
-          <a:xfrm>
-            <a:off x="886968" y="3566160"/>
-            <a:ext cx="4596232" cy="2468880"/>
+          <p:cNvPr id="15" name="Text 13"/>
+          <p:cNvSpPr txBox="1"/>
+          <p:nvPr/>
+        </p:nvSpPr>
+        <p:spPr>
+          <a:xfrm>
+            <a:off x="6708496" y="3017520"/>
+            <a:ext cx="4596232" cy="3017520"/>
           </a:xfrm>
           <a:prstGeom prst="rect">
             <a:avLst/>
@@ -3396,7 +2585,7 @@
                 <a:ea typeface="Segoe UI" pitchFamily="34" charset="-122"/>
                 <a:cs typeface="Segoe UI" pitchFamily="34" charset="-120"/>
               </a:rPr>
-              <a:t>«ФинАналитик», Роспатент № 2024618827: учёт 10 млрд ₽ в год</a:t>
+              <a:t>X5 Retail: внедрение новых технологий в рознице</a:t>
             </a:r>
             <a:endParaRPr lang="en-US" sz="1600" dirty="0"/>
           </a:p>
@@ -3420,7 +2609,7 @@
                 <a:ea typeface="Segoe UI" pitchFamily="34" charset="-122"/>
                 <a:cs typeface="Segoe UI" pitchFamily="34" charset="-120"/>
               </a:rPr>
-              <a:t>РАНХиГС, госуправление. Преподаватель РЭУ им. Плеханова</a:t>
+              <a:t>ФГУП «ЗащитаИнфоТранс»: реестр отечественного ПО</a:t>
             </a:r>
             <a:endParaRPr lang="en-US" sz="1600" dirty="0"/>
           </a:p>
@@ -3444,7 +2633,7 @@
                 <a:ea typeface="Segoe UI" pitchFamily="34" charset="-122"/>
                 <a:cs typeface="Segoe UI" pitchFamily="34" charset="-120"/>
               </a:rPr>
-              <a:t>Господдержка, структурирование сделок, переговоры с властью</a:t>
+              <a:t>Студия разработки: 4 → 15 человек, 50+ проектов</a:t>
             </a:r>
             <a:endParaRPr lang="en-US" sz="1600" dirty="0"/>
           </a:p>
@@ -3452,68 +2641,14 @@
       </p:sp>
       <p:sp>
         <p:nvSpPr>
-          <p:cNvPr id="11" name="Shape 9"/>
-          <p:cNvSpPr/>
-          <p:nvPr/>
-        </p:nvSpPr>
-        <p:spPr>
-          <a:xfrm>
-            <a:off x="6324448" y="1481328"/>
-            <a:ext cx="5364328" cy="4709160"/>
-          </a:xfrm>
-          <a:prstGeom prst="roundRect">
-            <a:avLst>
-              <a:gd name="adj" fmla="val 1748"/>
-            </a:avLst>
-          </a:prstGeom>
-          <a:solidFill>
-            <a:srgbClr val="FFFFFF"/>
-          </a:solidFill>
-          <a:ln w="12700">
-            <a:solidFill>
-              <a:srgbClr val="C9D3EA"/>
-            </a:solidFill>
-            <a:prstDash val="solid"/>
-          </a:ln>
-          <a:effectLst>
-            <a:outerShdw sx="100000" sy="100000" kx="0" ky="0" algn="bl" rotWithShape="0" blurRad="177800" dist="50800" dir="5400000">
-              <a:srgbClr val="7E88A8">
-                <a:alpha val="30000"/>
-              </a:srgbClr>
-            </a:outerShdw>
-          </a:effectLst>
-        </p:spPr>
-      </p:sp>
-      <p:sp>
-        <p:nvSpPr>
-          <p:cNvPr id="12" name="Shape 10"/>
-          <p:cNvSpPr/>
-          <p:nvPr/>
-        </p:nvSpPr>
-        <p:spPr>
-          <a:xfrm>
-            <a:off x="6690208" y="1810512"/>
-            <a:ext cx="457200" cy="54864"/>
-          </a:xfrm>
-          <a:prstGeom prst="rect">
-            <a:avLst/>
-          </a:prstGeom>
-          <a:solidFill>
-            <a:srgbClr val="1E2761"/>
-          </a:solidFill>
-          <a:ln/>
-        </p:spPr>
-      </p:sp>
-      <p:sp>
-        <p:nvSpPr>
-          <p:cNvPr id="13" name="Text 11"/>
-          <p:cNvSpPr txBox="1"/>
-          <p:nvPr/>
-        </p:nvSpPr>
-        <p:spPr>
-          <a:xfrm>
-            <a:off x="6690208" y="2011680"/>
-            <a:ext cx="4632808" cy="502920"/>
+          <p:cNvPr id="16" name="Text 14"/>
+          <p:cNvSpPr txBox="1"/>
+          <p:nvPr/>
+        </p:nvSpPr>
+        <p:spPr>
+          <a:xfrm>
+            <a:off x="502920" y="6473952"/>
+            <a:ext cx="1828800" cy="274320"/>
           </a:xfrm>
           <a:prstGeom prst="rect">
             <a:avLst/>
@@ -3529,226 +2664,54 @@
               <a:buNone/>
             </a:pPr>
             <a:r>
-              <a:rPr lang="en-US" sz="3000" dirty="0">
-                <a:solidFill>
-                  <a:srgbClr val="1E2761"/>
-                </a:solidFill>
-                <a:latin typeface="Segoe UI Semibold" pitchFamily="34" charset="0"/>
-                <a:ea typeface="Segoe UI Semibold" pitchFamily="34" charset="-122"/>
-                <a:cs typeface="Segoe UI Semibold" pitchFamily="34" charset="-120"/>
-              </a:rPr>
-              <a:t>Данила Кашев</a:t>
-            </a:r>
-            <a:endParaRPr lang="en-US" sz="3000" dirty="0"/>
-          </a:p>
-        </p:txBody>
-      </p:sp>
-      <p:sp>
-        <p:nvSpPr>
-          <p:cNvPr id="14" name="Text 12"/>
-          <p:cNvSpPr txBox="1"/>
-          <p:nvPr/>
-        </p:nvSpPr>
-        <p:spPr>
-          <a:xfrm>
-            <a:off x="6690208" y="2578608"/>
-            <a:ext cx="4632808" cy="274320"/>
-          </a:xfrm>
-          <a:prstGeom prst="rect">
-            <a:avLst/>
-          </a:prstGeom>
-          <a:noFill/>
-          <a:ln/>
-        </p:spPr>
-        <p:txBody>
-          <a:bodyPr wrap="square" lIns="0" tIns="0" rIns="0" bIns="0" rtlCol="0" anchor="ctr"/>
-          <a:lstStyle/>
-          <a:p>
-            <a:pPr indent="0" marL="0">
-              <a:buNone/>
-            </a:pPr>
-            <a:r>
-              <a:rPr lang="en-US" sz="1300" spc="200" kern="0" dirty="0">
-                <a:solidFill>
-                  <a:srgbClr val="B4552D"/>
-                </a:solidFill>
-                <a:latin typeface="Segoe UI Semibold" pitchFamily="34" charset="0"/>
-                <a:ea typeface="Segoe UI Semibold" pitchFamily="34" charset="-122"/>
-                <a:cs typeface="Segoe UI Semibold" pitchFamily="34" charset="-120"/>
-              </a:rPr>
-              <a:t>СО-ОСНОВАТЕЛЬ</a:t>
-            </a:r>
-            <a:endParaRPr lang="en-US" sz="1300" dirty="0"/>
-          </a:p>
-        </p:txBody>
-      </p:sp>
-      <p:sp>
-        <p:nvSpPr>
-          <p:cNvPr id="15" name="Text 13"/>
-          <p:cNvSpPr txBox="1"/>
-          <p:nvPr/>
-        </p:nvSpPr>
-        <p:spPr>
-          <a:xfrm>
-            <a:off x="6708496" y="3017520"/>
-            <a:ext cx="4596232" cy="3017520"/>
-          </a:xfrm>
-          <a:prstGeom prst="rect">
-            <a:avLst/>
-          </a:prstGeom>
-          <a:noFill/>
-          <a:ln/>
-        </p:spPr>
-        <p:txBody>
-          <a:bodyPr wrap="square" lIns="0" tIns="0" rIns="0" bIns="0" rtlCol="0" anchor="t"/>
-          <a:lstStyle/>
-          <a:p>
-            <a:pPr marL="152400" indent="-152400">
-              <a:lnSpc>
-                <a:spcPct val="108000"/>
-              </a:lnSpc>
-              <a:spcAft>
-                <a:spcPts val="800"/>
-              </a:spcAft>
-              <a:buSzPct val="100000"/>
-              <a:buChar char="•"/>
-            </a:pPr>
-            <a:r>
-              <a:rPr lang="en-US" sz="1600" dirty="0">
-                <a:solidFill>
-                  <a:srgbClr val="1B2140"/>
+              <a:rPr lang="en-US" sz="1200" dirty="0">
+                <a:solidFill>
+                  <a:srgbClr val="6B7699"/>
                 </a:solidFill>
                 <a:latin typeface="Segoe UI" pitchFamily="34" charset="0"/>
                 <a:ea typeface="Segoe UI" pitchFamily="34" charset="-122"/>
                 <a:cs typeface="Segoe UI" pitchFamily="34" charset="-120"/>
               </a:rPr>
-              <a:t>X5 Retail: внедрение новых технологий в рознице</a:t>
-            </a:r>
-            <a:endParaRPr lang="en-US" sz="1600" dirty="0"/>
-          </a:p>
-          <a:p>
-            <a:pPr marL="152400" indent="-152400">
-              <a:lnSpc>
-                <a:spcPct val="108000"/>
-              </a:lnSpc>
-              <a:spcAft>
-                <a:spcPts val="800"/>
-              </a:spcAft>
-              <a:buSzPct val="100000"/>
-              <a:buChar char="•"/>
-            </a:pPr>
-            <a:r>
-              <a:rPr lang="en-US" sz="1600" dirty="0">
-                <a:solidFill>
-                  <a:srgbClr val="1B2140"/>
+              <a:t>Ситалл</a:t>
+            </a:r>
+            <a:endParaRPr lang="en-US" sz="1200" dirty="0"/>
+          </a:p>
+        </p:txBody>
+      </p:sp>
+      <p:sp>
+        <p:nvSpPr>
+          <p:cNvPr id="17" name="Text 15"/>
+          <p:cNvSpPr txBox="1"/>
+          <p:nvPr/>
+        </p:nvSpPr>
+        <p:spPr>
+          <a:xfrm>
+            <a:off x="10774375" y="6473952"/>
+            <a:ext cx="914400" cy="274320"/>
+          </a:xfrm>
+          <a:prstGeom prst="rect">
+            <a:avLst/>
+          </a:prstGeom>
+          <a:noFill/>
+          <a:ln/>
+        </p:spPr>
+        <p:txBody>
+          <a:bodyPr wrap="square" lIns="0" tIns="0" rIns="0" bIns="0" rtlCol="0" anchor="ctr"/>
+          <a:lstStyle/>
+          <a:p>
+            <a:pPr algn="r" indent="0" marL="0">
+              <a:buNone/>
+            </a:pPr>
+            <a:r>
+              <a:rPr lang="en-US" sz="1200" dirty="0">
+                <a:solidFill>
+                  <a:srgbClr val="6B7699"/>
                 </a:solidFill>
                 <a:latin typeface="Segoe UI" pitchFamily="34" charset="0"/>
                 <a:ea typeface="Segoe UI" pitchFamily="34" charset="-122"/>
                 <a:cs typeface="Segoe UI" pitchFamily="34" charset="-120"/>
               </a:rPr>
-              <a:t>ФГУП «ЗащитаИнфоТранс»: реестр отечественного ПО</a:t>
-            </a:r>
-            <a:endParaRPr lang="en-US" sz="1600" dirty="0"/>
-          </a:p>
-          <a:p>
-            <a:pPr marL="152400" indent="-152400">
-              <a:lnSpc>
-                <a:spcPct val="108000"/>
-              </a:lnSpc>
-              <a:spcAft>
-                <a:spcPts val="800"/>
-              </a:spcAft>
-              <a:buSzPct val="100000"/>
-              <a:buChar char="•"/>
-            </a:pPr>
-            <a:r>
-              <a:rPr lang="en-US" sz="1600" dirty="0">
-                <a:solidFill>
-                  <a:srgbClr val="1B2140"/>
-                </a:solidFill>
-                <a:latin typeface="Segoe UI" pitchFamily="34" charset="0"/>
-                <a:ea typeface="Segoe UI" pitchFamily="34" charset="-122"/>
-                <a:cs typeface="Segoe UI" pitchFamily="34" charset="-120"/>
-              </a:rPr>
-              <a:t>Студия разработки: 4 → 15 человек, 50+ проектов</a:t>
-            </a:r>
-            <a:endParaRPr lang="en-US" sz="1600" dirty="0"/>
-          </a:p>
-        </p:txBody>
-      </p:sp>
-      <p:sp>
-        <p:nvSpPr>
-          <p:cNvPr id="16" name="Text 14"/>
-          <p:cNvSpPr txBox="1"/>
-          <p:nvPr/>
-        </p:nvSpPr>
-        <p:spPr>
-          <a:xfrm>
-            <a:off x="502920" y="6473952"/>
-            <a:ext cx="1828800" cy="274320"/>
-          </a:xfrm>
-          <a:prstGeom prst="rect">
-            <a:avLst/>
-          </a:prstGeom>
-          <a:noFill/>
-          <a:ln/>
-        </p:spPr>
-        <p:txBody>
-          <a:bodyPr wrap="square" lIns="0" tIns="0" rIns="0" bIns="0" rtlCol="0" anchor="ctr"/>
-          <a:lstStyle/>
-          <a:p>
-            <a:pPr indent="0" marL="0">
-              <a:buNone/>
-            </a:pPr>
-            <a:r>
-              <a:rPr lang="en-US" sz="1200" dirty="0">
-                <a:solidFill>
-                  <a:srgbClr val="6B7699"/>
-                </a:solidFill>
-                <a:latin typeface="Segoe UI" pitchFamily="34" charset="0"/>
-                <a:ea typeface="Segoe UI" pitchFamily="34" charset="-122"/>
-                <a:cs typeface="Segoe UI" pitchFamily="34" charset="-120"/>
-              </a:rPr>
-              <a:t>Ситалл</a:t>
-            </a:r>
-            <a:endParaRPr lang="en-US" sz="1200" dirty="0"/>
-          </a:p>
-        </p:txBody>
-      </p:sp>
-      <p:sp>
-        <p:nvSpPr>
-          <p:cNvPr id="17" name="Text 15"/>
-          <p:cNvSpPr txBox="1"/>
-          <p:nvPr/>
-        </p:nvSpPr>
-        <p:spPr>
-          <a:xfrm>
-            <a:off x="10774375" y="6473952"/>
-            <a:ext cx="914400" cy="274320"/>
-          </a:xfrm>
-          <a:prstGeom prst="rect">
-            <a:avLst/>
-          </a:prstGeom>
-          <a:noFill/>
-          <a:ln/>
-        </p:spPr>
-        <p:txBody>
-          <a:bodyPr wrap="square" lIns="0" tIns="0" rIns="0" bIns="0" rtlCol="0" anchor="ctr"/>
-          <a:lstStyle/>
-          <a:p>
-            <a:pPr algn="r" indent="0" marL="0">
-              <a:buNone/>
-            </a:pPr>
-            <a:r>
-              <a:rPr lang="en-US" sz="1200" dirty="0">
-                <a:solidFill>
-                  <a:srgbClr val="6B7699"/>
-                </a:solidFill>
-                <a:latin typeface="Segoe UI" pitchFamily="34" charset="0"/>
-                <a:ea typeface="Segoe UI" pitchFamily="34" charset="-122"/>
-                <a:cs typeface="Segoe UI" pitchFamily="34" charset="-120"/>
-              </a:rPr>
-              <a:t>11 / 11</a:t>
+              <a:t>10 / 10</a:t>
             </a:r>
             <a:endParaRPr lang="en-US" sz="1200" dirty="0"/>
           </a:p>
@@ -4729,7 +3692,7 @@
                 <a:ea typeface="Segoe UI" pitchFamily="34" charset="-122"/>
                 <a:cs typeface="Segoe UI" pitchFamily="34" charset="-120"/>
               </a:rPr>
-              <a:t>02 / 11</a:t>
+              <a:t>02 / 10</a:t>
             </a:r>
             <a:endParaRPr lang="en-US" sz="1200" dirty="0"/>
           </a:p>
@@ -5684,7 +4647,7 @@
                 <a:ea typeface="Segoe UI" pitchFamily="34" charset="-122"/>
                 <a:cs typeface="Segoe UI" pitchFamily="34" charset="-120"/>
               </a:rPr>
-              <a:t>03 / 11</a:t>
+              <a:t>03 / 10</a:t>
             </a:r>
             <a:endParaRPr lang="en-US" sz="1200" dirty="0"/>
           </a:p>
@@ -6593,7 +5556,7 @@
                 <a:ea typeface="Segoe UI" pitchFamily="34" charset="-122"/>
                 <a:cs typeface="Segoe UI" pitchFamily="34" charset="-120"/>
               </a:rPr>
-              <a:t>04 / 11</a:t>
+              <a:t>04 / 10</a:t>
             </a:r>
             <a:endParaRPr lang="en-US" sz="1200" dirty="0"/>
           </a:p>
@@ -8123,7 +7086,7 @@
                 <a:ea typeface="Segoe UI" pitchFamily="34" charset="-122"/>
                 <a:cs typeface="Segoe UI" pitchFamily="34" charset="-120"/>
               </a:rPr>
-              <a:t>05 / 11</a:t>
+              <a:t>05 / 10</a:t>
             </a:r>
             <a:endParaRPr lang="en-US" sz="1200" dirty="0"/>
           </a:p>
@@ -8904,7 +7867,7 @@
                 <a:ea typeface="Segoe UI" pitchFamily="34" charset="-122"/>
                 <a:cs typeface="Segoe UI" pitchFamily="34" charset="-120"/>
               </a:rPr>
-              <a:t>06 / 11</a:t>
+              <a:t>06 / 10</a:t>
             </a:r>
             <a:endParaRPr lang="en-US" sz="1200" dirty="0"/>
           </a:p>
@@ -8968,7 +7931,7 @@
                 <a:ea typeface="Segoe UI Semibold" pitchFamily="34" charset="-122"/>
                 <a:cs typeface="Segoe UI Semibold" pitchFamily="34" charset="-120"/>
               </a:rPr>
-              <a:t>ГДЕ МЫ СЕЙЧАС</a:t>
+              <a:t>ГДЕ МЫ ДОПОЛНЯЕМ</a:t>
             </a:r>
             <a:endParaRPr lang="en-US" sz="1300" dirty="0"/>
           </a:p>
@@ -9007,7 +7970,7 @@
                 <a:ea typeface="Segoe UI Semibold" pitchFamily="34" charset="-122"/>
                 <a:cs typeface="Segoe UI Semibold" pitchFamily="34" charset="-120"/>
               </a:rPr>
-              <a:t>Компания молодая, и мы этого не скрываем</a:t>
+              <a:t>Вы находите исполнителя. Мы доводим до внедрения</a:t>
             </a:r>
             <a:endParaRPr lang="en-US" sz="2700" dirty="0"/>
           </a:p>
@@ -9042,11 +8005,188 @@
         <p:spPr>
           <a:xfrm>
             <a:off x="502920" y="1481328"/>
-            <a:ext cx="5437480" cy="1975104"/>
+            <a:ext cx="5437480" cy="2304288"/>
           </a:xfrm>
           <a:prstGeom prst="roundRect">
             <a:avLst>
-              <a:gd name="adj" fmla="val 4167"/>
+              <a:gd name="adj" fmla="val 3571"/>
+            </a:avLst>
+          </a:prstGeom>
+          <a:solidFill>
+            <a:srgbClr val="FFFFFF"/>
+          </a:solidFill>
+          <a:ln w="12700">
+            <a:solidFill>
+              <a:srgbClr val="C9D3EA"/>
+            </a:solidFill>
+            <a:prstDash val="solid"/>
+          </a:ln>
+          <a:effectLst>
+            <a:outerShdw sx="100000" sy="100000" kx="0" ky="0" algn="bl" rotWithShape="0" blurRad="177800" dist="50800" dir="5400000">
+              <a:srgbClr val="7E88A8">
+                <a:alpha val="30000"/>
+              </a:srgbClr>
+            </a:outerShdw>
+          </a:effectLst>
+        </p:spPr>
+      </p:sp>
+      <p:sp>
+        <p:nvSpPr>
+          <p:cNvPr id="6" name="Shape 4"/>
+          <p:cNvSpPr/>
+          <p:nvPr/>
+        </p:nvSpPr>
+        <p:spPr>
+          <a:xfrm>
+            <a:off x="795528" y="1719072"/>
+            <a:ext cx="384048" cy="384048"/>
+          </a:xfrm>
+          <a:prstGeom prst="ellipse">
+            <a:avLst/>
+          </a:prstGeom>
+          <a:solidFill>
+            <a:srgbClr val="1E2761"/>
+          </a:solidFill>
+          <a:ln/>
+        </p:spPr>
+      </p:sp>
+      <p:sp>
+        <p:nvSpPr>
+          <p:cNvPr id="7" name="Text 5"/>
+          <p:cNvSpPr txBox="1"/>
+          <p:nvPr/>
+        </p:nvSpPr>
+        <p:spPr>
+          <a:xfrm>
+            <a:off x="795528" y="1719072"/>
+            <a:ext cx="384048" cy="384048"/>
+          </a:xfrm>
+          <a:prstGeom prst="rect">
+            <a:avLst/>
+          </a:prstGeom>
+          <a:noFill/>
+          <a:ln/>
+        </p:spPr>
+        <p:txBody>
+          <a:bodyPr wrap="square" lIns="0" tIns="0" rIns="0" bIns="0" rtlCol="0" anchor="ctr"/>
+          <a:lstStyle/>
+          <a:p>
+            <a:pPr algn="ctr" indent="0" marL="0">
+              <a:buNone/>
+            </a:pPr>
+            <a:r>
+              <a:rPr lang="en-US" sz="1600" dirty="0">
+                <a:solidFill>
+                  <a:srgbClr val="FFFFFF"/>
+                </a:solidFill>
+                <a:latin typeface="Segoe UI Semibold" pitchFamily="34" charset="0"/>
+                <a:ea typeface="Segoe UI Semibold" pitchFamily="34" charset="-122"/>
+                <a:cs typeface="Segoe UI Semibold" pitchFamily="34" charset="-120"/>
+              </a:rPr>
+              <a:t>1</a:t>
+            </a:r>
+            <a:endParaRPr lang="en-US" sz="1600" dirty="0"/>
+          </a:p>
+        </p:txBody>
+      </p:sp>
+      <p:sp>
+        <p:nvSpPr>
+          <p:cNvPr id="8" name="Text 6"/>
+          <p:cNvSpPr txBox="1"/>
+          <p:nvPr/>
+        </p:nvSpPr>
+        <p:spPr>
+          <a:xfrm>
+            <a:off x="795528" y="2194560"/>
+            <a:ext cx="4852264" cy="365760"/>
+          </a:xfrm>
+          <a:prstGeom prst="rect">
+            <a:avLst/>
+          </a:prstGeom>
+          <a:noFill/>
+          <a:ln/>
+        </p:spPr>
+        <p:txBody>
+          <a:bodyPr wrap="square" lIns="0" tIns="0" rIns="0" bIns="0" rtlCol="0" anchor="t"/>
+          <a:lstStyle/>
+          <a:p>
+            <a:pPr indent="0" marL="0">
+              <a:lnSpc>
+                <a:spcPct val="102000"/>
+              </a:lnSpc>
+              <a:buNone/>
+            </a:pPr>
+            <a:r>
+              <a:rPr lang="en-US" sz="2000" dirty="0">
+                <a:solidFill>
+                  <a:srgbClr val="1E2761"/>
+                </a:solidFill>
+                <a:latin typeface="Segoe UI Semibold" pitchFamily="34" charset="0"/>
+                <a:ea typeface="Segoe UI Semibold" pitchFamily="34" charset="-122"/>
+                <a:cs typeface="Segoe UI Semibold" pitchFamily="34" charset="-120"/>
+              </a:rPr>
+              <a:t>Заказчик приходит с задачей</a:t>
+            </a:r>
+            <a:endParaRPr lang="en-US" sz="2000" dirty="0"/>
+          </a:p>
+        </p:txBody>
+      </p:sp>
+      <p:sp>
+        <p:nvSpPr>
+          <p:cNvPr id="9" name="Text 7"/>
+          <p:cNvSpPr txBox="1"/>
+          <p:nvPr/>
+        </p:nvSpPr>
+        <p:spPr>
+          <a:xfrm>
+            <a:off x="795528" y="2633472"/>
+            <a:ext cx="4852264" cy="1005840"/>
+          </a:xfrm>
+          <a:prstGeom prst="rect">
+            <a:avLst/>
+          </a:prstGeom>
+          <a:noFill/>
+          <a:ln/>
+        </p:spPr>
+        <p:txBody>
+          <a:bodyPr wrap="square" lIns="0" tIns="0" rIns="0" bIns="0" rtlCol="0" anchor="t"/>
+          <a:lstStyle/>
+          <a:p>
+            <a:pPr indent="0" marL="0">
+              <a:lnSpc>
+                <a:spcPct val="108000"/>
+              </a:lnSpc>
+              <a:buNone/>
+            </a:pPr>
+            <a:r>
+              <a:rPr lang="en-US" sz="1600" dirty="0">
+                <a:solidFill>
+                  <a:srgbClr val="1B2140"/>
+                </a:solidFill>
+                <a:latin typeface="Segoe UI" pitchFamily="34" charset="0"/>
+                <a:ea typeface="Segoe UI" pitchFamily="34" charset="-122"/>
+                <a:cs typeface="Segoe UI" pitchFamily="34" charset="-120"/>
+              </a:rPr>
+              <a:t>Не с готовым ТЗ. Переводим задачу предприятия в техзадание, с которым можно искать исполнителя</a:t>
+            </a:r>
+            <a:endParaRPr lang="en-US" sz="1600" dirty="0"/>
+          </a:p>
+        </p:txBody>
+      </p:sp>
+      <p:sp>
+        <p:nvSpPr>
+          <p:cNvPr id="10" name="Shape 8"/>
+          <p:cNvSpPr/>
+          <p:nvPr/>
+        </p:nvSpPr>
+        <p:spPr>
+          <a:xfrm>
+            <a:off x="6251296" y="1481328"/>
+            <a:ext cx="5437480" cy="2304288"/>
+          </a:xfrm>
+          <a:prstGeom prst="roundRect">
+            <a:avLst>
+              <a:gd name="adj" fmla="val 3571"/>
             </a:avLst>
           </a:prstGeom>
           <a:solidFill>
@@ -9069,16 +8209,16 @@
       </p:sp>
       <p:sp>
         <p:nvSpPr>
-          <p:cNvPr id="6" name="Shape 4"/>
+          <p:cNvPr id="11" name="Shape 9"/>
           <p:cNvSpPr/>
           <p:nvPr/>
         </p:nvSpPr>
         <p:spPr>
           <a:xfrm>
-            <a:off x="795528" y="1737360"/>
-            <a:ext cx="384048" cy="45720"/>
-          </a:xfrm>
-          <a:prstGeom prst="rect">
+            <a:off x="6543904" y="1719072"/>
+            <a:ext cx="384048" cy="384048"/>
+          </a:xfrm>
+          <a:prstGeom prst="ellipse">
             <a:avLst/>
           </a:prstGeom>
           <a:solidFill>
@@ -9089,14 +8229,14 @@
       </p:sp>
       <p:sp>
         <p:nvSpPr>
-          <p:cNvPr id="7" name="Text 5"/>
-          <p:cNvSpPr txBox="1"/>
-          <p:nvPr/>
-        </p:nvSpPr>
-        <p:spPr>
-          <a:xfrm>
-            <a:off x="795528" y="1810512"/>
-            <a:ext cx="4852264" cy="713232"/>
+          <p:cNvPr id="12" name="Text 10"/>
+          <p:cNvSpPr txBox="1"/>
+          <p:nvPr/>
+        </p:nvSpPr>
+        <p:spPr>
+          <a:xfrm>
+            <a:off x="6543904" y="1719072"/>
+            <a:ext cx="384048" cy="384048"/>
           </a:xfrm>
           <a:prstGeom prst="rect">
             <a:avLst/>
@@ -9108,34 +8248,76 @@
           <a:bodyPr wrap="square" lIns="0" tIns="0" rIns="0" bIns="0" rtlCol="0" anchor="ctr"/>
           <a:lstStyle/>
           <a:p>
-            <a:pPr indent="0" marL="0">
-              <a:buNone/>
-            </a:pPr>
-            <a:r>
-              <a:rPr lang="en-US" sz="4400" dirty="0">
-                <a:solidFill>
-                  <a:srgbClr val="B4552D"/>
+            <a:pPr algn="ctr" indent="0" marL="0">
+              <a:buNone/>
+            </a:pPr>
+            <a:r>
+              <a:rPr lang="en-US" sz="1600" dirty="0">
+                <a:solidFill>
+                  <a:srgbClr val="FFFFFF"/>
                 </a:solidFill>
                 <a:latin typeface="Segoe UI Semibold" pitchFamily="34" charset="0"/>
                 <a:ea typeface="Segoe UI Semibold" pitchFamily="34" charset="-122"/>
                 <a:cs typeface="Segoe UI Semibold" pitchFamily="34" charset="-120"/>
               </a:rPr>
-              <a:t>Ноль</a:t>
-            </a:r>
-            <a:endParaRPr lang="en-US" sz="4400" dirty="0"/>
-          </a:p>
-        </p:txBody>
-      </p:sp>
-      <p:sp>
-        <p:nvSpPr>
-          <p:cNvPr id="8" name="Text 6"/>
-          <p:cNvSpPr txBox="1"/>
-          <p:nvPr/>
-        </p:nvSpPr>
-        <p:spPr>
-          <a:xfrm>
-            <a:off x="795528" y="2542032"/>
-            <a:ext cx="4852264" cy="512064"/>
+              <a:t>2</a:t>
+            </a:r>
+            <a:endParaRPr lang="en-US" sz="1600" dirty="0"/>
+          </a:p>
+        </p:txBody>
+      </p:sp>
+      <p:sp>
+        <p:nvSpPr>
+          <p:cNvPr id="13" name="Text 11"/>
+          <p:cNvSpPr txBox="1"/>
+          <p:nvPr/>
+        </p:nvSpPr>
+        <p:spPr>
+          <a:xfrm>
+            <a:off x="6543904" y="2194560"/>
+            <a:ext cx="4852264" cy="365760"/>
+          </a:xfrm>
+          <a:prstGeom prst="rect">
+            <a:avLst/>
+          </a:prstGeom>
+          <a:noFill/>
+          <a:ln/>
+        </p:spPr>
+        <p:txBody>
+          <a:bodyPr wrap="square" lIns="0" tIns="0" rIns="0" bIns="0" rtlCol="0" anchor="t"/>
+          <a:lstStyle/>
+          <a:p>
+            <a:pPr indent="0" marL="0">
+              <a:lnSpc>
+                <a:spcPct val="102000"/>
+              </a:lnSpc>
+              <a:buNone/>
+            </a:pPr>
+            <a:r>
+              <a:rPr lang="en-US" sz="2000" dirty="0">
+                <a:solidFill>
+                  <a:srgbClr val="1E2761"/>
+                </a:solidFill>
+                <a:latin typeface="Segoe UI Semibold" pitchFamily="34" charset="0"/>
+                <a:ea typeface="Segoe UI Semibold" pitchFamily="34" charset="-122"/>
+                <a:cs typeface="Segoe UI Semibold" pitchFamily="34" charset="-120"/>
+              </a:rPr>
+              <a:t>Часть задач решается не кодом</a:t>
+            </a:r>
+            <a:endParaRPr lang="en-US" sz="2000" dirty="0"/>
+          </a:p>
+        </p:txBody>
+      </p:sp>
+      <p:sp>
+        <p:nvSpPr>
+          <p:cNvPr id="14" name="Text 12"/>
+          <p:cNvSpPr txBox="1"/>
+          <p:nvPr/>
+        </p:nvSpPr>
+        <p:spPr>
+          <a:xfrm>
+            <a:off x="6543904" y="2633472"/>
+            <a:ext cx="4852264" cy="1005840"/>
           </a:xfrm>
           <a:prstGeom prst="rect">
             <a:avLst/>
@@ -9162,7 +8344,7 @@
                 <a:ea typeface="Segoe UI" pitchFamily="34" charset="-122"/>
                 <a:cs typeface="Segoe UI" pitchFamily="34" charset="-120"/>
               </a:rPr>
-              <a:t>внедрённых проектов. Первых платящих клиентов ещё нет</a:t>
+              <a:t>Технология, материал, процесс: под них находим научное решение и того, кто его сделает</a:t>
             </a:r>
             <a:endParaRPr lang="en-US" sz="1600" dirty="0"/>
           </a:p>
@@ -9170,18 +8352,18 @@
       </p:sp>
       <p:sp>
         <p:nvSpPr>
-          <p:cNvPr id="9" name="Shape 7"/>
+          <p:cNvPr id="15" name="Shape 13"/>
           <p:cNvSpPr/>
           <p:nvPr/>
         </p:nvSpPr>
         <p:spPr>
           <a:xfrm>
-            <a:off x="6251296" y="1481328"/>
-            <a:ext cx="5437480" cy="1975104"/>
+            <a:off x="502920" y="4096512"/>
+            <a:ext cx="5437480" cy="2304288"/>
           </a:xfrm>
           <a:prstGeom prst="roundRect">
             <a:avLst>
-              <a:gd name="adj" fmla="val 4167"/>
+              <a:gd name="adj" fmla="val 3571"/>
             </a:avLst>
           </a:prstGeom>
           <a:solidFill>
@@ -9204,16 +8386,16 @@
       </p:sp>
       <p:sp>
         <p:nvSpPr>
-          <p:cNvPr id="10" name="Shape 8"/>
+          <p:cNvPr id="16" name="Shape 14"/>
           <p:cNvSpPr/>
           <p:nvPr/>
         </p:nvSpPr>
         <p:spPr>
           <a:xfrm>
-            <a:off x="6543904" y="1737360"/>
-            <a:ext cx="384048" cy="45720"/>
-          </a:xfrm>
-          <a:prstGeom prst="rect">
+            <a:off x="795528" y="4334256"/>
+            <a:ext cx="384048" cy="384048"/>
+          </a:xfrm>
+          <a:prstGeom prst="ellipse">
             <a:avLst/>
           </a:prstGeom>
           <a:solidFill>
@@ -9224,14 +8406,14 @@
       </p:sp>
       <p:sp>
         <p:nvSpPr>
-          <p:cNvPr id="11" name="Text 9"/>
-          <p:cNvSpPr txBox="1"/>
-          <p:nvPr/>
-        </p:nvSpPr>
-        <p:spPr>
-          <a:xfrm>
-            <a:off x="6543904" y="1810512"/>
-            <a:ext cx="4852264" cy="713232"/>
+          <p:cNvPr id="17" name="Text 15"/>
+          <p:cNvSpPr txBox="1"/>
+          <p:nvPr/>
+        </p:nvSpPr>
+        <p:spPr>
+          <a:xfrm>
+            <a:off x="795528" y="4334256"/>
+            <a:ext cx="384048" cy="384048"/>
           </a:xfrm>
           <a:prstGeom prst="rect">
             <a:avLst/>
@@ -9243,34 +8425,76 @@
           <a:bodyPr wrap="square" lIns="0" tIns="0" rIns="0" bIns="0" rtlCol="0" anchor="ctr"/>
           <a:lstStyle/>
           <a:p>
-            <a:pPr indent="0" marL="0">
-              <a:buNone/>
-            </a:pPr>
-            <a:r>
-              <a:rPr lang="en-US" sz="4400" dirty="0">
-                <a:solidFill>
-                  <a:srgbClr val="1E2761"/>
+            <a:pPr algn="ctr" indent="0" marL="0">
+              <a:buNone/>
+            </a:pPr>
+            <a:r>
+              <a:rPr lang="en-US" sz="1600" dirty="0">
+                <a:solidFill>
+                  <a:srgbClr val="FFFFFF"/>
                 </a:solidFill>
                 <a:latin typeface="Segoe UI Semibold" pitchFamily="34" charset="0"/>
                 <a:ea typeface="Segoe UI Semibold" pitchFamily="34" charset="-122"/>
                 <a:cs typeface="Segoe UI Semibold" pitchFamily="34" charset="-120"/>
               </a:rPr>
-              <a:t>Четыре</a:t>
-            </a:r>
-            <a:endParaRPr lang="en-US" sz="4400" dirty="0"/>
-          </a:p>
-        </p:txBody>
-      </p:sp>
-      <p:sp>
-        <p:nvSpPr>
-          <p:cNvPr id="12" name="Text 10"/>
-          <p:cNvSpPr txBox="1"/>
-          <p:nvPr/>
-        </p:nvSpPr>
-        <p:spPr>
-          <a:xfrm>
-            <a:off x="6543904" y="2542032"/>
-            <a:ext cx="4852264" cy="512064"/>
+              <a:t>3</a:t>
+            </a:r>
+            <a:endParaRPr lang="en-US" sz="1600" dirty="0"/>
+          </a:p>
+        </p:txBody>
+      </p:sp>
+      <p:sp>
+        <p:nvSpPr>
+          <p:cNvPr id="18" name="Text 16"/>
+          <p:cNvSpPr txBox="1"/>
+          <p:nvPr/>
+        </p:nvSpPr>
+        <p:spPr>
+          <a:xfrm>
+            <a:off x="795528" y="4809744"/>
+            <a:ext cx="4852264" cy="365760"/>
+          </a:xfrm>
+          <a:prstGeom prst="rect">
+            <a:avLst/>
+          </a:prstGeom>
+          <a:noFill/>
+          <a:ln/>
+        </p:spPr>
+        <p:txBody>
+          <a:bodyPr wrap="square" lIns="0" tIns="0" rIns="0" bIns="0" rtlCol="0" anchor="t"/>
+          <a:lstStyle/>
+          <a:p>
+            <a:pPr indent="0" marL="0">
+              <a:lnSpc>
+                <a:spcPct val="102000"/>
+              </a:lnSpc>
+              <a:buNone/>
+            </a:pPr>
+            <a:r>
+              <a:rPr lang="en-US" sz="2000" dirty="0">
+                <a:solidFill>
+                  <a:srgbClr val="1E2761"/>
+                </a:solidFill>
+                <a:latin typeface="Segoe UI Semibold" pitchFamily="34" charset="0"/>
+                <a:ea typeface="Segoe UI Semibold" pitchFamily="34" charset="-122"/>
+                <a:cs typeface="Segoe UI Semibold" pitchFamily="34" charset="-120"/>
+              </a:rPr>
+              <a:t>Сделку структурируем</a:t>
+            </a:r>
+            <a:endParaRPr lang="en-US" sz="2000" dirty="0"/>
+          </a:p>
+        </p:txBody>
+      </p:sp>
+      <p:sp>
+        <p:nvSpPr>
+          <p:cNvPr id="19" name="Text 17"/>
+          <p:cNvSpPr txBox="1"/>
+          <p:nvPr/>
+        </p:nvSpPr>
+        <p:spPr>
+          <a:xfrm>
+            <a:off x="795528" y="5248656"/>
+            <a:ext cx="4852264" cy="1005840"/>
           </a:xfrm>
           <a:prstGeom prst="rect">
             <a:avLst/>
@@ -9297,7 +8521,7 @@
                 <a:ea typeface="Segoe UI" pitchFamily="34" charset="-122"/>
                 <a:cs typeface="Segoe UI" pitchFamily="34" charset="-120"/>
               </a:rPr>
-              <a:t>региона с готовыми адресными материалами: Свердловская, Югра, Владимирская, Московская</a:t>
+              <a:t>Договор с научной организацией, этапы и приёмка, заявка на господдержку — наша зона</a:t>
             </a:r>
             <a:endParaRPr lang="en-US" sz="1600" dirty="0"/>
           </a:p>
@@ -9305,153 +8529,18 @@
       </p:sp>
       <p:sp>
         <p:nvSpPr>
-          <p:cNvPr id="13" name="Shape 11"/>
+          <p:cNvPr id="20" name="Shape 18"/>
           <p:cNvSpPr/>
           <p:nvPr/>
         </p:nvSpPr>
         <p:spPr>
           <a:xfrm>
-            <a:off x="502920" y="3767328"/>
-            <a:ext cx="5437480" cy="1975104"/>
+            <a:off x="6251296" y="4096512"/>
+            <a:ext cx="5437480" cy="2304288"/>
           </a:xfrm>
           <a:prstGeom prst="roundRect">
             <a:avLst>
-              <a:gd name="adj" fmla="val 4167"/>
-            </a:avLst>
-          </a:prstGeom>
-          <a:solidFill>
-            <a:srgbClr val="FFFFFF"/>
-          </a:solidFill>
-          <a:ln w="12700">
-            <a:solidFill>
-              <a:srgbClr val="C9D3EA"/>
-            </a:solidFill>
-            <a:prstDash val="solid"/>
-          </a:ln>
-          <a:effectLst>
-            <a:outerShdw sx="100000" sy="100000" kx="0" ky="0" algn="bl" rotWithShape="0" blurRad="177800" dist="50800" dir="5400000">
-              <a:srgbClr val="7E88A8">
-                <a:alpha val="30000"/>
-              </a:srgbClr>
-            </a:outerShdw>
-          </a:effectLst>
-        </p:spPr>
-      </p:sp>
-      <p:sp>
-        <p:nvSpPr>
-          <p:cNvPr id="14" name="Shape 12"/>
-          <p:cNvSpPr/>
-          <p:nvPr/>
-        </p:nvSpPr>
-        <p:spPr>
-          <a:xfrm>
-            <a:off x="795528" y="4023360"/>
-            <a:ext cx="384048" cy="45720"/>
-          </a:xfrm>
-          <a:prstGeom prst="rect">
-            <a:avLst/>
-          </a:prstGeom>
-          <a:solidFill>
-            <a:srgbClr val="1E2761"/>
-          </a:solidFill>
-          <a:ln/>
-        </p:spPr>
-      </p:sp>
-      <p:sp>
-        <p:nvSpPr>
-          <p:cNvPr id="15" name="Text 13"/>
-          <p:cNvSpPr txBox="1"/>
-          <p:nvPr/>
-        </p:nvSpPr>
-        <p:spPr>
-          <a:xfrm>
-            <a:off x="795528" y="4096512"/>
-            <a:ext cx="4852264" cy="713232"/>
-          </a:xfrm>
-          <a:prstGeom prst="rect">
-            <a:avLst/>
-          </a:prstGeom>
-          <a:noFill/>
-          <a:ln/>
-        </p:spPr>
-        <p:txBody>
-          <a:bodyPr wrap="square" lIns="0" tIns="0" rIns="0" bIns="0" rtlCol="0" anchor="ctr"/>
-          <a:lstStyle/>
-          <a:p>
-            <a:pPr indent="0" marL="0">
-              <a:buNone/>
-            </a:pPr>
-            <a:r>
-              <a:rPr lang="en-US" sz="3600" dirty="0">
-                <a:solidFill>
-                  <a:srgbClr val="1E2761"/>
-                </a:solidFill>
-                <a:latin typeface="Segoe UI Semibold" pitchFamily="34" charset="0"/>
-                <a:ea typeface="Segoe UI Semibold" pitchFamily="34" charset="-122"/>
-                <a:cs typeface="Segoe UI Semibold" pitchFamily="34" charset="-120"/>
-              </a:rPr>
-              <a:t>Работает</a:t>
-            </a:r>
-            <a:endParaRPr lang="en-US" sz="3600" dirty="0"/>
-          </a:p>
-        </p:txBody>
-      </p:sp>
-      <p:sp>
-        <p:nvSpPr>
-          <p:cNvPr id="16" name="Text 14"/>
-          <p:cNvSpPr txBox="1"/>
-          <p:nvPr/>
-        </p:nvSpPr>
-        <p:spPr>
-          <a:xfrm>
-            <a:off x="795528" y="4828032"/>
-            <a:ext cx="4852264" cy="512064"/>
-          </a:xfrm>
-          <a:prstGeom prst="rect">
-            <a:avLst/>
-          </a:prstGeom>
-          <a:noFill/>
-          <a:ln/>
-        </p:spPr>
-        <p:txBody>
-          <a:bodyPr wrap="square" lIns="0" tIns="0" rIns="0" bIns="0" rtlCol="0" anchor="t"/>
-          <a:lstStyle/>
-          <a:p>
-            <a:pPr indent="0" marL="0">
-              <a:lnSpc>
-                <a:spcPct val="108000"/>
-              </a:lnSpc>
-              <a:buNone/>
-            </a:pPr>
-            <a:r>
-              <a:rPr lang="en-US" sz="1600" dirty="0">
-                <a:solidFill>
-                  <a:srgbClr val="1B2140"/>
-                </a:solidFill>
-                <a:latin typeface="Segoe UI" pitchFamily="34" charset="0"/>
-                <a:ea typeface="Segoe UI" pitchFamily="34" charset="-122"/>
-                <a:cs typeface="Segoe UI" pitchFamily="34" charset="-120"/>
-              </a:rPr>
-              <a:t>собственная поисковая система решений «Ситалл Скаут»</a:t>
-            </a:r>
-            <a:endParaRPr lang="en-US" sz="1600" dirty="0"/>
-          </a:p>
-        </p:txBody>
-      </p:sp>
-      <p:sp>
-        <p:nvSpPr>
-          <p:cNvPr id="17" name="Shape 15"/>
-          <p:cNvSpPr/>
-          <p:nvPr/>
-        </p:nvSpPr>
-        <p:spPr>
-          <a:xfrm>
-            <a:off x="6251296" y="3767328"/>
-            <a:ext cx="5437480" cy="1975104"/>
-          </a:xfrm>
-          <a:prstGeom prst="roundRect">
-            <a:avLst>
-              <a:gd name="adj" fmla="val 4167"/>
+              <a:gd name="adj" fmla="val 3571"/>
             </a:avLst>
           </a:prstGeom>
           <a:solidFill>
@@ -9474,16 +8563,16 @@
       </p:sp>
       <p:sp>
         <p:nvSpPr>
-          <p:cNvPr id="18" name="Shape 16"/>
+          <p:cNvPr id="21" name="Shape 19"/>
           <p:cNvSpPr/>
           <p:nvPr/>
         </p:nvSpPr>
         <p:spPr>
           <a:xfrm>
-            <a:off x="6543904" y="4023360"/>
-            <a:ext cx="384048" cy="45720"/>
-          </a:xfrm>
-          <a:prstGeom prst="rect">
+            <a:off x="6543904" y="4334256"/>
+            <a:ext cx="384048" cy="384048"/>
+          </a:xfrm>
+          <a:prstGeom prst="ellipse">
             <a:avLst/>
           </a:prstGeom>
           <a:solidFill>
@@ -9494,14 +8583,14 @@
       </p:sp>
       <p:sp>
         <p:nvSpPr>
-          <p:cNvPr id="19" name="Text 17"/>
-          <p:cNvSpPr txBox="1"/>
-          <p:nvPr/>
-        </p:nvSpPr>
-        <p:spPr>
-          <a:xfrm>
-            <a:off x="6543904" y="4096512"/>
-            <a:ext cx="4852264" cy="713232"/>
+          <p:cNvPr id="22" name="Text 20"/>
+          <p:cNvSpPr txBox="1"/>
+          <p:nvPr/>
+        </p:nvSpPr>
+        <p:spPr>
+          <a:xfrm>
+            <a:off x="6543904" y="4334256"/>
+            <a:ext cx="384048" cy="384048"/>
           </a:xfrm>
           <a:prstGeom prst="rect">
             <a:avLst/>
@@ -9513,34 +8602,76 @@
           <a:bodyPr wrap="square" lIns="0" tIns="0" rIns="0" bIns="0" rtlCol="0" anchor="ctr"/>
           <a:lstStyle/>
           <a:p>
-            <a:pPr indent="0" marL="0">
-              <a:buNone/>
-            </a:pPr>
-            <a:r>
-              <a:rPr lang="en-US" sz="3400" dirty="0">
-                <a:solidFill>
-                  <a:srgbClr val="B4552D"/>
+            <a:pPr algn="ctr" indent="0" marL="0">
+              <a:buNone/>
+            </a:pPr>
+            <a:r>
+              <a:rPr lang="en-US" sz="1600" dirty="0">
+                <a:solidFill>
+                  <a:srgbClr val="FFFFFF"/>
                 </a:solidFill>
                 <a:latin typeface="Segoe UI Semibold" pitchFamily="34" charset="0"/>
                 <a:ea typeface="Segoe UI Semibold" pitchFamily="34" charset="-122"/>
                 <a:cs typeface="Segoe UI Semibold" pitchFamily="34" charset="-120"/>
               </a:rPr>
-              <a:t>Проверьте</a:t>
-            </a:r>
-            <a:endParaRPr lang="en-US" sz="3400" dirty="0"/>
-          </a:p>
-        </p:txBody>
-      </p:sp>
-      <p:sp>
-        <p:nvSpPr>
-          <p:cNvPr id="20" name="Text 18"/>
-          <p:cNvSpPr txBox="1"/>
-          <p:nvPr/>
-        </p:nvSpPr>
-        <p:spPr>
-          <a:xfrm>
-            <a:off x="6543904" y="4828032"/>
-            <a:ext cx="4852264" cy="512064"/>
+              <a:t>4</a:t>
+            </a:r>
+            <a:endParaRPr lang="en-US" sz="1600" dirty="0"/>
+          </a:p>
+        </p:txBody>
+      </p:sp>
+      <p:sp>
+        <p:nvSpPr>
+          <p:cNvPr id="23" name="Text 21"/>
+          <p:cNvSpPr txBox="1"/>
+          <p:nvPr/>
+        </p:nvSpPr>
+        <p:spPr>
+          <a:xfrm>
+            <a:off x="6543904" y="4809744"/>
+            <a:ext cx="4852264" cy="365760"/>
+          </a:xfrm>
+          <a:prstGeom prst="rect">
+            <a:avLst/>
+          </a:prstGeom>
+          <a:noFill/>
+          <a:ln/>
+        </p:spPr>
+        <p:txBody>
+          <a:bodyPr wrap="square" lIns="0" tIns="0" rIns="0" bIns="0" rtlCol="0" anchor="t"/>
+          <a:lstStyle/>
+          <a:p>
+            <a:pPr indent="0" marL="0">
+              <a:lnSpc>
+                <a:spcPct val="102000"/>
+              </a:lnSpc>
+              <a:buNone/>
+            </a:pPr>
+            <a:r>
+              <a:rPr lang="en-US" sz="2000" dirty="0">
+                <a:solidFill>
+                  <a:srgbClr val="1E2761"/>
+                </a:solidFill>
+                <a:latin typeface="Segoe UI Semibold" pitchFamily="34" charset="0"/>
+                <a:ea typeface="Segoe UI Semibold" pitchFamily="34" charset="-122"/>
+                <a:cs typeface="Segoe UI Semibold" pitchFamily="34" charset="-120"/>
+              </a:rPr>
+              <a:t>Отвечаем за внедрение</a:t>
+            </a:r>
+            <a:endParaRPr lang="en-US" sz="2000" dirty="0"/>
+          </a:p>
+        </p:txBody>
+      </p:sp>
+      <p:sp>
+        <p:nvSpPr>
+          <p:cNvPr id="24" name="Text 22"/>
+          <p:cNvSpPr txBox="1"/>
+          <p:nvPr/>
+        </p:nvSpPr>
+        <p:spPr>
+          <a:xfrm>
+            <a:off x="6543904" y="5248656"/>
+            <a:ext cx="4852264" cy="1005840"/>
           </a:xfrm>
           <a:prstGeom prst="rect">
             <a:avLst/>
@@ -9567,7 +8698,7 @@
                 <a:ea typeface="Segoe UI" pitchFamily="34" charset="-122"/>
                 <a:cs typeface="Segoe UI" pitchFamily="34" charset="-120"/>
               </a:rPr>
-              <a:t>дайте непрофильную задачу из вашего потока — сделаем подбор за свой счёт</a:t>
+              <a:t>Сопровождаем до запуска на производстве. Часть вознаграждения — только при результате</a:t>
             </a:r>
             <a:endParaRPr lang="en-US" sz="1600" dirty="0"/>
           </a:p>
@@ -9575,69 +8706,7 @@
       </p:sp>
       <p:sp>
         <p:nvSpPr>
-          <p:cNvPr id="21" name="Shape 19"/>
-          <p:cNvSpPr/>
-          <p:nvPr/>
-        </p:nvSpPr>
-        <p:spPr>
-          <a:xfrm>
-            <a:off x="502920" y="5925312"/>
-            <a:ext cx="64008" cy="548640"/>
-          </a:xfrm>
-          <a:prstGeom prst="rect">
-            <a:avLst/>
-          </a:prstGeom>
-          <a:solidFill>
-            <a:srgbClr val="1E2761"/>
-          </a:solidFill>
-          <a:ln/>
-        </p:spPr>
-      </p:sp>
-      <p:sp>
-        <p:nvSpPr>
-          <p:cNvPr id="22" name="Text 20"/>
-          <p:cNvSpPr txBox="1"/>
-          <p:nvPr/>
-        </p:nvSpPr>
-        <p:spPr>
-          <a:xfrm>
-            <a:off x="758952" y="5897880"/>
-            <a:ext cx="10820095" cy="603504"/>
-          </a:xfrm>
-          <a:prstGeom prst="rect">
-            <a:avLst/>
-          </a:prstGeom>
-          <a:noFill/>
-          <a:ln/>
-        </p:spPr>
-        <p:txBody>
-          <a:bodyPr wrap="square" lIns="0" tIns="0" rIns="0" bIns="0" rtlCol="0" anchor="ctr"/>
-          <a:lstStyle/>
-          <a:p>
-            <a:pPr indent="0" marL="0">
-              <a:lnSpc>
-                <a:spcPct val="105000"/>
-              </a:lnSpc>
-              <a:buNone/>
-            </a:pPr>
-            <a:r>
-              <a:rPr lang="en-US" sz="2000" dirty="0">
-                <a:solidFill>
-                  <a:srgbClr val="1E2761"/>
-                </a:solidFill>
-                <a:latin typeface="Segoe UI Semibold" pitchFamily="34" charset="0"/>
-                <a:ea typeface="Segoe UI Semibold" pitchFamily="34" charset="-122"/>
-                <a:cs typeface="Segoe UI Semibold" pitchFamily="34" charset="-120"/>
-              </a:rPr>
-              <a:t>Лучше проверить нас на живой задаче, чем поверить на слово</a:t>
-            </a:r>
-            <a:endParaRPr lang="en-US" sz="2000" dirty="0"/>
-          </a:p>
-        </p:txBody>
-      </p:sp>
-      <p:sp>
-        <p:nvSpPr>
-          <p:cNvPr id="23" name="Text 21"/>
+          <p:cNvPr id="25" name="Text 23"/>
           <p:cNvSpPr txBox="1"/>
           <p:nvPr/>
         </p:nvSpPr>
@@ -9676,7 +8745,7 @@
       </p:sp>
       <p:sp>
         <p:nvSpPr>
-          <p:cNvPr id="24" name="Text 22"/>
+          <p:cNvPr id="26" name="Text 24"/>
           <p:cNvSpPr txBox="1"/>
           <p:nvPr/>
         </p:nvSpPr>
@@ -9707,7 +8776,7 @@
                 <a:ea typeface="Segoe UI" pitchFamily="34" charset="-122"/>
                 <a:cs typeface="Segoe UI" pitchFamily="34" charset="-120"/>
               </a:rPr>
-              <a:t>07 / 11</a:t>
+              <a:t>07 / 10</a:t>
             </a:r>
             <a:endParaRPr lang="en-US" sz="1200" dirty="0"/>
           </a:p>
@@ -9771,7 +8840,7 @@
                 <a:ea typeface="Segoe UI Semibold" pitchFamily="34" charset="-122"/>
                 <a:cs typeface="Segoe UI Semibold" pitchFamily="34" charset="-120"/>
               </a:rPr>
-              <a:t>ЧТО У НАС ОБЩЕГО</a:t>
+              <a:t>ПРЕДЛОЖЕНИЕ</a:t>
             </a:r>
             <a:endParaRPr lang="en-US" sz="1300" dirty="0"/>
           </a:p>
@@ -9810,7 +8879,7 @@
                 <a:ea typeface="Segoe UI Semibold" pitchFamily="34" charset="-122"/>
                 <a:cs typeface="Segoe UI Semibold" pitchFamily="34" charset="-120"/>
               </a:rPr>
-              <a:t>Один и тот же бизнес по разные стороны от кода</a:t>
+              <a:t>Что мы закрываем для вашего заказчика</a:t>
             </a:r>
             <a:endParaRPr lang="en-US" sz="2700" dirty="0"/>
           </a:p>
@@ -9938,7 +9007,7 @@
         <p:spPr>
           <a:xfrm>
             <a:off x="795528" y="2194560"/>
-            <a:ext cx="4852264" cy="786384"/>
+            <a:ext cx="4852264" cy="365760"/>
           </a:xfrm>
           <a:prstGeom prst="rect">
             <a:avLst/>
@@ -9965,7 +9034,7 @@
                 <a:ea typeface="Segoe UI Semibold" pitchFamily="34" charset="-122"/>
                 <a:cs typeface="Segoe UI Semibold" pitchFamily="34" charset="-120"/>
               </a:rPr>
-              <a:t>Стоим между заказчиком и исполнителем</a:t>
+              <a:t>Непрофильная задача — нам</a:t>
             </a:r>
             <a:endParaRPr lang="en-US" sz="2000" dirty="0"/>
           </a:p>
@@ -9979,8 +9048,8 @@
         </p:nvSpPr>
         <p:spPr>
           <a:xfrm>
-            <a:off x="795528" y="3054096"/>
-            <a:ext cx="4852264" cy="585216"/>
+            <a:off x="795528" y="2633472"/>
+            <a:ext cx="4852264" cy="676656"/>
           </a:xfrm>
           <a:prstGeom prst="rect">
             <a:avLst/>
@@ -10007,7 +9076,7 @@
                 <a:ea typeface="Segoe UI" pitchFamily="34" charset="-122"/>
                 <a:cs typeface="Segoe UI" pitchFamily="34" charset="-120"/>
               </a:rPr>
-              <a:t>Обе площадки закрывают одно: заказчик не знает, кто сделает работу</a:t>
+              <a:t>Пришла к вам, но решается не кодом. Механику передачи вы описали сами</a:t>
             </a:r>
             <a:endParaRPr lang="en-US" sz="1600" dirty="0"/>
           </a:p>
@@ -10015,7 +9084,67 @@
       </p:sp>
       <p:sp>
         <p:nvSpPr>
-          <p:cNvPr id="10" name="Shape 8"/>
+          <p:cNvPr id="10" name="Text 8"/>
+          <p:cNvSpPr txBox="1"/>
+          <p:nvPr/>
+        </p:nvSpPr>
+        <p:spPr>
+          <a:xfrm>
+            <a:off x="795528" y="3438144"/>
+            <a:ext cx="4852264" cy="237744"/>
+          </a:xfrm>
+          <a:prstGeom prst="rect">
+            <a:avLst/>
+          </a:prstGeom>
+          <a:noFill/>
+          <a:ln/>
+        </p:spPr>
+        <p:txBody>
+          <a:bodyPr wrap="square" lIns="0" tIns="0" rIns="0" bIns="0" rtlCol="0" anchor="ctr"/>
+          <a:lstStyle/>
+          <a:p>
+            <a:pPr indent="0" marL="0">
+              <a:buNone/>
+            </a:pPr>
+            <a:r>
+              <a:rPr lang="en-US" sz="1200" i="1" dirty="0">
+                <a:solidFill>
+                  <a:srgbClr val="6B7699"/>
+                </a:solidFill>
+                <a:latin typeface="Segoe UI" pitchFamily="34" charset="0"/>
+                <a:ea typeface="Segoe UI" pitchFamily="34" charset="-122"/>
+                <a:cs typeface="Segoe UI" pitchFamily="34" charset="-120"/>
+              </a:rPr>
+              <a:t>Источник: </a:t>
+            </a:r>
+            <a:pPr indent="0" marL="0">
+              <a:buNone/>
+            </a:pPr>
+            <a:r>
+              <a:rPr lang="en-US" sz="1200" i="1" u="sng" dirty="0">
+                <a:solidFill>
+                  <a:srgbClr val="6B7699"/>
+                </a:solidFill>
+                <a:latin typeface="Segoe UI" pitchFamily="34" charset="0"/>
+                <a:ea typeface="Segoe UI" pitchFamily="34" charset="-122"/>
+                <a:cs typeface="Segoe UI" pitchFamily="34" charset="-120"/>
+                <a:hlinkClick r:id="rId1" invalidUrl="" action="" tgtFrame="" tooltip="" history="1" highlightClick="0" endSnd="0">
+                  <a:extLst>
+                    <a:ext uri="{A12FA001-AC4F-418D-AE19-62706E023703}">
+                      <ahyp:hlinkClr xmlns:ahyp="http://schemas.microsoft.com/office/drawing/2018/hyperlinkcolor" val="tx"/>
+                    </a:ext>
+                  </a:extLst>
+                </a:hlinkClick>
+              </a:rPr>
+              <a:t>Площадка IT-Заказов</a:t>
+            </a:r>
+            <a:endParaRPr lang="en-US" sz="1200" dirty="0"/>
+          </a:p>
+        </p:txBody>
+      </p:sp>
+      <p:sp>
+        <p:nvSpPr>
+          <p:cNvPr id="11" name="Shape 9"/>
           <p:cNvSpPr/>
           <p:nvPr/>
         </p:nvSpPr>
@@ -10049,7 +9178,7 @@
       </p:sp>
       <p:sp>
         <p:nvSpPr>
-          <p:cNvPr id="11" name="Shape 9"/>
+          <p:cNvPr id="12" name="Shape 10"/>
           <p:cNvSpPr/>
           <p:nvPr/>
         </p:nvSpPr>
@@ -10069,7 +9198,7 @@
       </p:sp>
       <p:sp>
         <p:nvSpPr>
-          <p:cNvPr id="12" name="Text 10"/>
+          <p:cNvPr id="13" name="Text 11"/>
           <p:cNvSpPr txBox="1"/>
           <p:nvPr/>
         </p:nvSpPr>
@@ -10108,7 +9237,7 @@
       </p:sp>
       <p:sp>
         <p:nvSpPr>
-          <p:cNvPr id="13" name="Text 11"/>
+          <p:cNvPr id="14" name="Text 12"/>
           <p:cNvSpPr txBox="1"/>
           <p:nvPr/>
         </p:nvSpPr>
@@ -10142,7 +9271,7 @@
                 <a:ea typeface="Segoe UI Semibold" pitchFamily="34" charset="-122"/>
                 <a:cs typeface="Segoe UI Semibold" pitchFamily="34" charset="-120"/>
               </a:rPr>
-              <a:t>Предмет не пересекается</a:t>
+              <a:t>Подбор с проверкой</a:t>
             </a:r>
             <a:endParaRPr lang="en-US" sz="2000" dirty="0"/>
           </a:p>
@@ -10150,7 +9279,7 @@
       </p:sp>
       <p:sp>
         <p:nvSpPr>
-          <p:cNvPr id="14" name="Text 12"/>
+          <p:cNvPr id="15" name="Text 13"/>
           <p:cNvSpPr txBox="1"/>
           <p:nvPr/>
         </p:nvSpPr>
@@ -10184,7 +9313,7 @@
                 <a:ea typeface="Segoe UI" pitchFamily="34" charset="-122"/>
                 <a:cs typeface="Segoe UI" pitchFamily="34" charset="-120"/>
               </a:rPr>
-              <a:t>У вас код и внедрение ИТ. У нас технология, материалы, производство</a:t>
+              <a:t>5–7 решений под задачу, каждое со ссылкой на первоисточник и заключением профильного учёного</a:t>
             </a:r>
             <a:endParaRPr lang="en-US" sz="1600" dirty="0"/>
           </a:p>
@@ -10192,7 +9321,7 @@
       </p:sp>
       <p:sp>
         <p:nvSpPr>
-          <p:cNvPr id="15" name="Shape 13"/>
+          <p:cNvPr id="16" name="Shape 14"/>
           <p:cNvSpPr/>
           <p:nvPr/>
         </p:nvSpPr>
@@ -10226,7 +9355,7 @@
       </p:sp>
       <p:sp>
         <p:nvSpPr>
-          <p:cNvPr id="16" name="Shape 14"/>
+          <p:cNvPr id="17" name="Shape 15"/>
           <p:cNvSpPr/>
           <p:nvPr/>
         </p:nvSpPr>
@@ -10246,7 +9375,7 @@
       </p:sp>
       <p:sp>
         <p:nvSpPr>
-          <p:cNvPr id="17" name="Text 15"/>
+          <p:cNvPr id="18" name="Text 16"/>
           <p:cNvSpPr txBox="1"/>
           <p:nvPr/>
         </p:nvSpPr>
@@ -10285,7 +9414,7 @@
       </p:sp>
       <p:sp>
         <p:nvSpPr>
-          <p:cNvPr id="18" name="Text 16"/>
+          <p:cNvPr id="19" name="Text 17"/>
           <p:cNvSpPr txBox="1"/>
           <p:nvPr/>
         </p:nvSpPr>
@@ -10319,7 +9448,7 @@
                 <a:ea typeface="Segoe UI Semibold" pitchFamily="34" charset="-122"/>
                 <a:cs typeface="Segoe UI Semibold" pitchFamily="34" charset="-120"/>
               </a:rPr>
-              <a:t>Оба начинаем с техзадания</a:t>
+              <a:t>Сделка и господдержка</a:t>
             </a:r>
             <a:endParaRPr lang="en-US" sz="2000" dirty="0"/>
           </a:p>
@@ -10327,7 +9456,7 @@
       </p:sp>
       <p:sp>
         <p:nvSpPr>
-          <p:cNvPr id="19" name="Text 17"/>
+          <p:cNvPr id="20" name="Text 18"/>
           <p:cNvSpPr txBox="1"/>
           <p:nvPr/>
         </p:nvSpPr>
@@ -10361,7 +9490,7 @@
                 <a:ea typeface="Segoe UI" pitchFamily="34" charset="-122"/>
                 <a:cs typeface="Segoe UI" pitchFamily="34" charset="-120"/>
               </a:rPr>
-              <a:t>Вы помогаете составить ТЗ бесплатно до размещения заказа. Мы переводим в техзадание технологическую задачу</a:t>
+              <a:t>Договор, этапы, приёмка и заявка на софинансирование по проекту вашего заказчика</a:t>
             </a:r>
             <a:endParaRPr lang="en-US" sz="1600" dirty="0"/>
           </a:p>
@@ -10369,7 +9498,7 @@
       </p:sp>
       <p:sp>
         <p:nvSpPr>
-          <p:cNvPr id="20" name="Shape 18"/>
+          <p:cNvPr id="21" name="Shape 19"/>
           <p:cNvSpPr/>
           <p:nvPr/>
         </p:nvSpPr>
@@ -10403,7 +9532,7 @@
       </p:sp>
       <p:sp>
         <p:nvSpPr>
-          <p:cNvPr id="21" name="Shape 19"/>
+          <p:cNvPr id="22" name="Shape 20"/>
           <p:cNvSpPr/>
           <p:nvPr/>
         </p:nvSpPr>
@@ -10423,7 +9552,7 @@
       </p:sp>
       <p:sp>
         <p:nvSpPr>
-          <p:cNvPr id="22" name="Text 20"/>
+          <p:cNvPr id="23" name="Text 21"/>
           <p:cNvSpPr txBox="1"/>
           <p:nvPr/>
         </p:nvSpPr>
@@ -10462,7 +9591,7 @@
       </p:sp>
       <p:sp>
         <p:nvSpPr>
-          <p:cNvPr id="23" name="Text 21"/>
+          <p:cNvPr id="24" name="Text 22"/>
           <p:cNvSpPr txBox="1"/>
           <p:nvPr/>
         </p:nvSpPr>
@@ -10496,7 +9625,7 @@
                 <a:ea typeface="Segoe UI Semibold" pitchFamily="34" charset="-122"/>
                 <a:cs typeface="Segoe UI Semibold" pitchFamily="34" charset="-120"/>
               </a:rPr>
-              <a:t>Заказчик один и тот же</a:t>
+              <a:t>Внедрение до запуска</a:t>
             </a:r>
             <a:endParaRPr lang="en-US" sz="2000" dirty="0"/>
           </a:p>
@@ -10504,7 +9633,7 @@
       </p:sp>
       <p:sp>
         <p:nvSpPr>
-          <p:cNvPr id="24" name="Text 22"/>
+          <p:cNvPr id="25" name="Text 23"/>
           <p:cNvSpPr txBox="1"/>
           <p:nvPr/>
         </p:nvSpPr>
@@ -10538,7 +9667,7 @@
                 <a:ea typeface="Segoe UI" pitchFamily="34" charset="-122"/>
                 <a:cs typeface="Segoe UI" pitchFamily="34" charset="-120"/>
               </a:rPr>
-              <a:t>Предприятию рядом с новой технологией почти всегда нужен цифровой контур — и наоборот</a:t>
+              <a:t>Ведём проект на производстве. ИТ-часть таких проектов возвращаем на площадку</a:t>
             </a:r>
             <a:endParaRPr lang="en-US" sz="1600" dirty="0"/>
           </a:p>
@@ -10546,7 +9675,7 @@
       </p:sp>
       <p:sp>
         <p:nvSpPr>
-          <p:cNvPr id="25" name="Text 23"/>
+          <p:cNvPr id="26" name="Text 24"/>
           <p:cNvSpPr txBox="1"/>
           <p:nvPr/>
         </p:nvSpPr>
@@ -10585,7 +9714,7 @@
       </p:sp>
       <p:sp>
         <p:nvSpPr>
-          <p:cNvPr id="26" name="Text 24"/>
+          <p:cNvPr id="27" name="Text 25"/>
           <p:cNvSpPr txBox="1"/>
           <p:nvPr/>
         </p:nvSpPr>
@@ -10616,7 +9745,7 @@
                 <a:ea typeface="Segoe UI" pitchFamily="34" charset="-122"/>
                 <a:cs typeface="Segoe UI" pitchFamily="34" charset="-120"/>
               </a:rPr>
-              <a:t>08 / 11</a:t>
+              <a:t>08 / 10</a:t>
             </a:r>
             <a:endParaRPr lang="en-US" sz="1200" dirty="0"/>
           </a:p>
@@ -10680,7 +9809,7 @@
                 <a:ea typeface="Segoe UI Semibold" pitchFamily="34" charset="-122"/>
                 <a:cs typeface="Segoe UI Semibold" pitchFamily="34" charset="-120"/>
               </a:rPr>
-              <a:t>ПРЕДЛОЖЕНИЕ</a:t>
+              <a:t>КАК НАЧНЁМ</a:t>
             </a:r>
             <a:endParaRPr lang="en-US" sz="1300" dirty="0"/>
           </a:p>
@@ -10719,7 +9848,7 @@
                 <a:ea typeface="Segoe UI Semibold" pitchFamily="34" charset="-122"/>
                 <a:cs typeface="Segoe UI Semibold" pitchFamily="34" charset="-120"/>
               </a:rPr>
-              <a:t>Обмен заказами, которые каждому из нас некуда деть</a:t>
+              <a:t>Один проект вашего заказчика — от задачи до внедрения</a:t>
             </a:r>
             <a:endParaRPr lang="en-US" sz="2700" dirty="0"/>
           </a:p>
@@ -10754,11 +9883,11 @@
         <p:spPr>
           <a:xfrm>
             <a:off x="502920" y="1481328"/>
-            <a:ext cx="5437480" cy="2304288"/>
+            <a:ext cx="5437480" cy="2075688"/>
           </a:xfrm>
           <a:prstGeom prst="roundRect">
             <a:avLst>
-              <a:gd name="adj" fmla="val 3571"/>
+              <a:gd name="adj" fmla="val 3965"/>
             </a:avLst>
           </a:prstGeom>
           <a:solidFill>
@@ -10874,7 +10003,7 @@
                 <a:ea typeface="Segoe UI Semibold" pitchFamily="34" charset="-122"/>
                 <a:cs typeface="Segoe UI Semibold" pitchFamily="34" charset="-120"/>
               </a:rPr>
-              <a:t>Непрофильный заказ — нам</a:t>
+              <a:t>Одна задача на пробу</a:t>
             </a:r>
             <a:endParaRPr lang="en-US" sz="2000" dirty="0"/>
           </a:p>
@@ -10889,7 +10018,7 @@
         <p:spPr>
           <a:xfrm>
             <a:off x="795528" y="2633472"/>
-            <a:ext cx="4852264" cy="1005840"/>
+            <a:ext cx="4852264" cy="777240"/>
           </a:xfrm>
           <a:prstGeom prst="rect">
             <a:avLst/>
@@ -10916,7 +10045,7 @@
                 <a:ea typeface="Segoe UI" pitchFamily="34" charset="-122"/>
                 <a:cs typeface="Segoe UI" pitchFamily="34" charset="-120"/>
               </a:rPr>
-              <a:t>Задачи из вашего потока, которые решаются не кодом, а технологией или материалом</a:t>
+              <a:t>Берём непрофильную задачу из вашего потока: диагностика и подбор за наш счёт</a:t>
             </a:r>
             <a:endParaRPr lang="en-US" sz="1600" dirty="0"/>
           </a:p>
@@ -10931,11 +10060,11 @@
         <p:spPr>
           <a:xfrm>
             <a:off x="6251296" y="1481328"/>
-            <a:ext cx="5437480" cy="2304288"/>
+            <a:ext cx="5437480" cy="2075688"/>
           </a:xfrm>
           <a:prstGeom prst="roundRect">
             <a:avLst>
-              <a:gd name="adj" fmla="val 3571"/>
+              <a:gd name="adj" fmla="val 3965"/>
             </a:avLst>
           </a:prstGeom>
           <a:solidFill>
@@ -11051,7 +10180,7 @@
                 <a:ea typeface="Segoe UI Semibold" pitchFamily="34" charset="-122"/>
                 <a:cs typeface="Segoe UI Semibold" pitchFamily="34" charset="-120"/>
               </a:rPr>
-              <a:t>Цифровой контур — вам</a:t>
+              <a:t>Результат — заказчику</a:t>
             </a:r>
             <a:endParaRPr lang="en-US" sz="2000" dirty="0"/>
           </a:p>
@@ -11066,7 +10195,7 @@
         <p:spPr>
           <a:xfrm>
             <a:off x="6543904" y="2633472"/>
-            <a:ext cx="4852264" cy="1005840"/>
+            <a:ext cx="4852264" cy="777240"/>
           </a:xfrm>
           <a:prstGeom prst="rect">
             <a:avLst/>
@@ -11093,7 +10222,7 @@
                 <a:ea typeface="Segoe UI" pitchFamily="34" charset="-122"/>
                 <a:cs typeface="Segoe UI" pitchFamily="34" charset="-120"/>
               </a:rPr>
-              <a:t>ИТ-задачи предприятий, с которыми работаем мы: учёт, интеграция, автоматизация линии</a:t>
+              <a:t>Показываем подбор ему, а не нам в отчёт. Не подошло ни одно решение — говорим об этом прямо</a:t>
             </a:r>
             <a:endParaRPr lang="en-US" sz="1600" dirty="0"/>
           </a:p>
@@ -11107,12 +10236,12 @@
         </p:nvSpPr>
         <p:spPr>
           <a:xfrm>
-            <a:off x="502920" y="4096512"/>
-            <a:ext cx="5437480" cy="2304288"/>
+            <a:off x="502920" y="3867912"/>
+            <a:ext cx="5437480" cy="2075688"/>
           </a:xfrm>
           <a:prstGeom prst="roundRect">
             <a:avLst>
-              <a:gd name="adj" fmla="val 3571"/>
+              <a:gd name="adj" fmla="val 3965"/>
             </a:avLst>
           </a:prstGeom>
           <a:solidFill>
@@ -11141,7 +10270,7 @@
         </p:nvSpPr>
         <p:spPr>
           <a:xfrm>
-            <a:off x="795528" y="4334256"/>
+            <a:off x="795528" y="4105656"/>
             <a:ext cx="384048" cy="384048"/>
           </a:xfrm>
           <a:prstGeom prst="ellipse">
@@ -11161,7 +10290,7 @@
         </p:nvSpPr>
         <p:spPr>
           <a:xfrm>
-            <a:off x="795528" y="4334256"/>
+            <a:off x="795528" y="4105656"/>
             <a:ext cx="384048" cy="384048"/>
           </a:xfrm>
           <a:prstGeom prst="rect">
@@ -11200,7 +10329,7 @@
         </p:nvSpPr>
         <p:spPr>
           <a:xfrm>
-            <a:off x="795528" y="4809744"/>
+            <a:off x="795528" y="4581144"/>
             <a:ext cx="4852264" cy="365760"/>
           </a:xfrm>
           <a:prstGeom prst="rect">
@@ -11228,7 +10357,7 @@
                 <a:ea typeface="Segoe UI Semibold" pitchFamily="34" charset="-122"/>
                 <a:cs typeface="Segoe UI Semibold" pitchFamily="34" charset="-120"/>
               </a:rPr>
-              <a:t>К заказчику идём вдвоём</a:t>
+              <a:t>Дальше сделка и внедрение</a:t>
             </a:r>
             <a:endParaRPr lang="en-US" sz="2000" dirty="0"/>
           </a:p>
@@ -11242,8 +10371,8 @@
         </p:nvSpPr>
         <p:spPr>
           <a:xfrm>
-            <a:off x="795528" y="5248656"/>
-            <a:ext cx="4852264" cy="1005840"/>
+            <a:off x="795528" y="5020056"/>
+            <a:ext cx="4852264" cy="777240"/>
           </a:xfrm>
           <a:prstGeom prst="rect">
             <a:avLst/>
@@ -11270,7 +10399,7 @@
                 <a:ea typeface="Segoe UI" pitchFamily="34" charset="-122"/>
                 <a:cs typeface="Segoe UI" pitchFamily="34" charset="-120"/>
               </a:rPr>
-              <a:t>Промышленному предприятию цифра и технология нужны одним пакетом</a:t>
+              <a:t>Договор, господдержка, сопровождение до запуска — это уже наша работа, не ваша</a:t>
             </a:r>
             <a:endParaRPr lang="en-US" sz="1600" dirty="0"/>
           </a:p>
@@ -11284,12 +10413,12 @@
         </p:nvSpPr>
         <p:spPr>
           <a:xfrm>
-            <a:off x="6251296" y="4096512"/>
-            <a:ext cx="5437480" cy="2304288"/>
+            <a:off x="6251296" y="3867912"/>
+            <a:ext cx="5437480" cy="2075688"/>
           </a:xfrm>
           <a:prstGeom prst="roundRect">
             <a:avLst>
-              <a:gd name="adj" fmla="val 3571"/>
+              <a:gd name="adj" fmla="val 3965"/>
             </a:avLst>
           </a:prstGeom>
           <a:solidFill>
@@ -11318,7 +10447,7 @@
         </p:nvSpPr>
         <p:spPr>
           <a:xfrm>
-            <a:off x="6543904" y="4334256"/>
+            <a:off x="6543904" y="4105656"/>
             <a:ext cx="384048" cy="384048"/>
           </a:xfrm>
           <a:prstGeom prst="ellipse">
@@ -11338,7 +10467,7 @@
         </p:nvSpPr>
         <p:spPr>
           <a:xfrm>
-            <a:off x="6543904" y="4334256"/>
+            <a:off x="6543904" y="4105656"/>
             <a:ext cx="384048" cy="384048"/>
           </a:xfrm>
           <a:prstGeom prst="rect">
@@ -11377,7 +10506,7 @@
         </p:nvSpPr>
         <p:spPr>
           <a:xfrm>
-            <a:off x="6543904" y="4809744"/>
+            <a:off x="6543904" y="4581144"/>
             <a:ext cx="4852264" cy="365760"/>
           </a:xfrm>
           <a:prstGeom prst="rect">
@@ -11405,7 +10534,7 @@
                 <a:ea typeface="Segoe UI Semibold" pitchFamily="34" charset="-122"/>
                 <a:cs typeface="Segoe UI Semibold" pitchFamily="34" charset="-120"/>
               </a:rPr>
-              <a:t>Механика у вас уже есть</a:t>
+              <a:t>Условия по итогу</a:t>
             </a:r>
             <a:endParaRPr lang="en-US" sz="2000" dirty="0"/>
           </a:p>
@@ -11419,8 +10548,8 @@
         </p:nvSpPr>
         <p:spPr>
           <a:xfrm>
-            <a:off x="6543904" y="5248656"/>
-            <a:ext cx="4852264" cy="676656"/>
+            <a:off x="6543904" y="5020056"/>
+            <a:ext cx="4852264" cy="777240"/>
           </a:xfrm>
           <a:prstGeom prst="rect">
             <a:avLst/>
@@ -11447,7 +10576,7 @@
                 <a:ea typeface="Segoe UI" pitchFamily="34" charset="-122"/>
                 <a:cs typeface="Segoe UI" pitchFamily="34" charset="-120"/>
               </a:rPr>
-              <a:t>Передача непрофильного заказа и партнёрская программа у вас работают</a:t>
+              <a:t>Порядок передачи заказов и вознаграждения фиксируем письменно после первого проекта</a:t>
             </a:r>
             <a:endParaRPr lang="en-US" sz="1600" dirty="0"/>
           </a:p>
@@ -11461,8 +10590,8 @@
         </p:nvSpPr>
         <p:spPr>
           <a:xfrm>
-            <a:off x="6543904" y="6053328"/>
-            <a:ext cx="4852264" cy="237744"/>
+            <a:off x="502920" y="6053328"/>
+            <a:ext cx="11185855" cy="329184"/>
           </a:xfrm>
           <a:prstGeom prst="rect">
             <a:avLst/>
@@ -11478,7 +10607,7 @@
               <a:buNone/>
             </a:pPr>
             <a:r>
-              <a:rPr lang="en-US" sz="1200" i="1" dirty="0">
+              <a:rPr lang="en-US" sz="1600" i="1" dirty="0">
                 <a:solidFill>
                   <a:srgbClr val="6B7699"/>
                 </a:solidFill>
@@ -11486,28 +10615,46 @@
                 <a:ea typeface="Segoe UI" pitchFamily="34" charset="-122"/>
                 <a:cs typeface="Segoe UI" pitchFamily="34" charset="-120"/>
               </a:rPr>
-              <a:t>Источник: </a:t>
-            </a:r>
-            <a:pPr indent="0" marL="0">
-              <a:buNone/>
-            </a:pPr>
-            <a:r>
-              <a:rPr lang="en-US" sz="1200" i="1" u="sng" dirty="0">
+              <a:t>Вложений с вашей стороны нет. Условия вознаграждения обсуждаем голосом</a:t>
+            </a:r>
+            <a:endParaRPr lang="en-US" sz="1600" dirty="0"/>
+          </a:p>
+        </p:txBody>
+      </p:sp>
+      <p:sp>
+        <p:nvSpPr>
+          <p:cNvPr id="26" name="Text 24"/>
+          <p:cNvSpPr txBox="1"/>
+          <p:nvPr/>
+        </p:nvSpPr>
+        <p:spPr>
+          <a:xfrm>
+            <a:off x="502920" y="6473952"/>
+            <a:ext cx="1828800" cy="274320"/>
+          </a:xfrm>
+          <a:prstGeom prst="rect">
+            <a:avLst/>
+          </a:prstGeom>
+          <a:noFill/>
+          <a:ln/>
+        </p:spPr>
+        <p:txBody>
+          <a:bodyPr wrap="square" lIns="0" tIns="0" rIns="0" bIns="0" rtlCol="0" anchor="ctr"/>
+          <a:lstStyle/>
+          <a:p>
+            <a:pPr indent="0" marL="0">
+              <a:buNone/>
+            </a:pPr>
+            <a:r>
+              <a:rPr lang="en-US" sz="1200" dirty="0">
                 <a:solidFill>
                   <a:srgbClr val="6B7699"/>
                 </a:solidFill>
                 <a:latin typeface="Segoe UI" pitchFamily="34" charset="0"/>
                 <a:ea typeface="Segoe UI" pitchFamily="34" charset="-122"/>
                 <a:cs typeface="Segoe UI" pitchFamily="34" charset="-120"/>
-                <a:hlinkClick r:id="rId1" invalidUrl="" action="" tgtFrame="" tooltip="" history="1" highlightClick="0" endSnd="0">
-                  <a:extLst>
-                    <a:ext uri="{A12FA001-AC4F-418D-AE19-62706E023703}">
-                      <ahyp:hlinkClr xmlns:ahyp="http://schemas.microsoft.com/office/drawing/2018/hyperlinkcolor" val="tx"/>
-                    </a:ext>
-                  </a:extLst>
-                </a:hlinkClick>
-              </a:rPr>
-              <a:t>Площадка IT-Заказов</a:t>
+              </a:rPr>
+              <a:t>Ситалл</a:t>
             </a:r>
             <a:endParaRPr lang="en-US" sz="1200" dirty="0"/>
           </a:p>
@@ -11515,14 +10662,14 @@
       </p:sp>
       <p:sp>
         <p:nvSpPr>
-          <p:cNvPr id="26" name="Text 24"/>
-          <p:cNvSpPr txBox="1"/>
-          <p:nvPr/>
-        </p:nvSpPr>
-        <p:spPr>
-          <a:xfrm>
-            <a:off x="502920" y="6473952"/>
-            <a:ext cx="1828800" cy="274320"/>
+          <p:cNvPr id="27" name="Text 25"/>
+          <p:cNvSpPr txBox="1"/>
+          <p:nvPr/>
+        </p:nvSpPr>
+        <p:spPr>
+          <a:xfrm>
+            <a:off x="10774375" y="6473952"/>
+            <a:ext cx="914400" cy="274320"/>
           </a:xfrm>
           <a:prstGeom prst="rect">
             <a:avLst/>
@@ -11534,7 +10681,7 @@
           <a:bodyPr wrap="square" lIns="0" tIns="0" rIns="0" bIns="0" rtlCol="0" anchor="ctr"/>
           <a:lstStyle/>
           <a:p>
-            <a:pPr indent="0" marL="0">
+            <a:pPr algn="r" indent="0" marL="0">
               <a:buNone/>
             </a:pPr>
             <a:r>
@@ -11546,46 +10693,7 @@
                 <a:ea typeface="Segoe UI" pitchFamily="34" charset="-122"/>
                 <a:cs typeface="Segoe UI" pitchFamily="34" charset="-120"/>
               </a:rPr>
-              <a:t>Ситалл</a:t>
-            </a:r>
-            <a:endParaRPr lang="en-US" sz="1200" dirty="0"/>
-          </a:p>
-        </p:txBody>
-      </p:sp>
-      <p:sp>
-        <p:nvSpPr>
-          <p:cNvPr id="27" name="Text 25"/>
-          <p:cNvSpPr txBox="1"/>
-          <p:nvPr/>
-        </p:nvSpPr>
-        <p:spPr>
-          <a:xfrm>
-            <a:off x="10774375" y="6473952"/>
-            <a:ext cx="914400" cy="274320"/>
-          </a:xfrm>
-          <a:prstGeom prst="rect">
-            <a:avLst/>
-          </a:prstGeom>
-          <a:noFill/>
-          <a:ln/>
-        </p:spPr>
-        <p:txBody>
-          <a:bodyPr wrap="square" lIns="0" tIns="0" rIns="0" bIns="0" rtlCol="0" anchor="ctr"/>
-          <a:lstStyle/>
-          <a:p>
-            <a:pPr algn="r" indent="0" marL="0">
-              <a:buNone/>
-            </a:pPr>
-            <a:r>
-              <a:rPr lang="en-US" sz="1200" dirty="0">
-                <a:solidFill>
-                  <a:srgbClr val="6B7699"/>
-                </a:solidFill>
-                <a:latin typeface="Segoe UI" pitchFamily="34" charset="0"/>
-                <a:ea typeface="Segoe UI" pitchFamily="34" charset="-122"/>
-                <a:cs typeface="Segoe UI" pitchFamily="34" charset="-120"/>
-              </a:rPr>
-              <a:t>09 / 11</a:t>
+              <a:t>09 / 10</a:t>
             </a:r>
             <a:endParaRPr lang="en-US" sz="1200" dirty="0"/>
           </a:p>
